--- a/1 Year 12 Weekly/Week 08 (02 Nov) 1.2.3 Methodologies + 2.1.3/1 Lesson 2.1.3.pptx
+++ b/1 Year 12 Weekly/Week 08 (02 Nov) 1.2.3 Methodologies + 2.1.3/1 Lesson 2.1.3.pptx
@@ -19,6 +19,22 @@
     <p:sldId id="267" r:id="rId18"/>
     <p:sldId id="268" r:id="rId19"/>
     <p:sldId id="269" r:id="rId20"/>
+    <p:sldId id="270" r:id="rId21"/>
+    <p:sldId id="271" r:id="rId22"/>
+    <p:sldId id="272" r:id="rId23"/>
+    <p:sldId id="273" r:id="rId24"/>
+    <p:sldId id="274" r:id="rId25"/>
+    <p:sldId id="275" r:id="rId26"/>
+    <p:sldId id="276" r:id="rId27"/>
+    <p:sldId id="277" r:id="rId28"/>
+    <p:sldId id="278" r:id="rId29"/>
+    <p:sldId id="279" r:id="rId30"/>
+    <p:sldId id="280" r:id="rId31"/>
+    <p:sldId id="281" r:id="rId32"/>
+    <p:sldId id="282" r:id="rId33"/>
+    <p:sldId id="283" r:id="rId34"/>
+    <p:sldId id="284" r:id="rId35"/>
+    <p:sldId id="285" r:id="rId36"/>
   </p:sldIdLst>
   <p:sldSz cx="12191695" cy="6858000" type="screen4x3"/>
   <p:notesSz cx="6858000" cy="9144000"/>
@@ -3183,7 +3199,7 @@
                 </a:solidFill>
                 <a:latin typeface="Calibri"/>
               </a:rPr>
-              <a:t>Lesson deck — editable skeleton: adapt freely.</a:t>
+              <a:t>Week 08 (02 Nov)</a:t>
             </a:r>
           </a:p>
         </p:txBody>
@@ -3243,7 +3259,7 @@
                 </a:solidFill>
                 <a:latin typeface="Calibri"/>
               </a:rPr>
-              <a:t>Exam technique</a:t>
+              <a:t>Determining the order of steps</a:t>
             </a:r>
           </a:p>
         </p:txBody>
@@ -3272,37 +3288,61 @@
           <a:p>
             <a:pPr/>
             <a:r>
-              <a:rPr sz="2200" b="0">
-                <a:solidFill>
-                  <a:srgbClr val="222222"/>
-                </a:solidFill>
-                <a:latin typeface="Calibri"/>
-              </a:rPr>
-              <a:t>Name the scenario's actual sub-procedures, not generic ones.</a:t>
+              <a:rPr sz="2000" b="0">
+                <a:solidFill>
+                  <a:srgbClr val="222222"/>
+                </a:solidFill>
+                <a:latin typeface="Calibri"/>
+              </a:rPr>
+              <a:t>Some steps consume the output of earlier steps, so their order is fixed.</a:t>
             </a:r>
           </a:p>
           <a:p>
             <a:pPr/>
             <a:r>
-              <a:rPr sz="2200" b="0">
-                <a:solidFill>
-                  <a:srgbClr val="222222"/>
-                </a:solidFill>
-                <a:latin typeface="Calibri"/>
-              </a:rPr>
-              <a:t>State the fixed order and identify at least one dependency.</a:t>
+              <a:rPr sz="2000" b="0">
+                <a:solidFill>
+                  <a:srgbClr val="222222"/>
+                </a:solidFill>
+                <a:latin typeface="Calibri"/>
+              </a:rPr>
+              <a:t>A dependency exists when step B needs data produced by step A.</a:t>
             </a:r>
           </a:p>
           <a:p>
             <a:pPr/>
             <a:r>
-              <a:rPr sz="2200" b="0">
-                <a:solidFill>
-                  <a:srgbClr val="222222"/>
-                </a:solidFill>
-                <a:latin typeface="Calibri"/>
-              </a:rPr>
-              <a:t>Explain the dependency in terms of one step using another's output.</a:t>
+              <a:rPr sz="2000" b="0">
+                <a:solidFill>
+                  <a:srgbClr val="222222"/>
+                </a:solidFill>
+                <a:latin typeface="Calibri"/>
+              </a:rPr>
+              <a:t>Steps with no dependency between them are order-independent and could even run concurrently.</a:t>
+            </a:r>
+          </a:p>
+          <a:p>
+            <a:pPr/>
+            <a:r>
+              <a:rPr sz="2000" b="0">
+                <a:solidFill>
+                  <a:srgbClr val="222222"/>
+                </a:solidFill>
+                <a:latin typeface="Calibri"/>
+              </a:rPr>
+              <a:t>Justify any stated order by naming the dependency, not by habit or preference.</a:t>
+            </a:r>
+          </a:p>
+          <a:p>
+            <a:pPr/>
+            <a:r>
+              <a:rPr sz="1800" b="1">
+                <a:solidFill>
+                  <a:srgbClr val="B76E00"/>
+                </a:solidFill>
+                <a:latin typeface="Calibri"/>
+              </a:rPr>
+              <a:t>Exam answers earn AO2 marks by naming which output each later step depends on.</a:t>
             </a:r>
           </a:p>
         </p:txBody>
@@ -3362,7 +3402,7 @@
                 </a:solidFill>
                 <a:latin typeface="Calibri"/>
               </a:rPr>
-              <a:t>Worked example</a:t>
+              <a:t>Worked ordering: an online order</a:t>
             </a:r>
           </a:p>
         </p:txBody>
@@ -3391,29 +3431,17 @@
           <a:p>
             <a:pPr/>
             <a:r>
-              <a:rPr sz="2200" b="1">
-                <a:solidFill>
-                  <a:srgbClr val="2B6CB0"/>
-                </a:solidFill>
-                <a:latin typeface="Calibri"/>
-              </a:rPr>
-              <a:t>Sequencing a school 'end-of-term reports' program</a:t>
-            </a:r>
-          </a:p>
-          <a:p>
-            <a:pPr lvl="1"/>
-            <a:r>
               <a:rPr sz="2000" b="0">
                 <a:solidFill>
                   <a:srgbClr val="222222"/>
                 </a:solidFill>
                 <a:latin typeface="Calibri"/>
               </a:rPr>
-              <a:t>1. Decompose into named sub-procedures: readPupilData, calculateGrades, generateComments, assembleReport, printReport.</a:t>
-            </a:r>
-          </a:p>
-          <a:p>
-            <a:pPr lvl="1"/>
+              <a:t>Take basket contents, check stock, take payment, decrement stock, generate confirmation, email receipt.</a:t>
+            </a:r>
+          </a:p>
+          <a:p>
+            <a:pPr/>
             <a:r>
               <a:rPr sz="2000" b="0">
                 <a:solidFill>
@@ -3421,11 +3449,11 @@
                 </a:solidFill>
                 <a:latin typeface="Calibri"/>
               </a:rPr>
-              <a:t>2. Order: readPupilData first, then calculateGrades, then generateComments, then assembleReport, then printReport.</a:t>
-            </a:r>
-          </a:p>
-          <a:p>
-            <a:pPr lvl="1"/>
+              <a:t>Payment must follow the stock check: charging for unavailable goods is a concrete failure.</a:t>
+            </a:r>
+          </a:p>
+          <a:p>
+            <a:pPr/>
             <a:r>
               <a:rPr sz="2000" b="0">
                 <a:solidFill>
@@ -3433,11 +3461,11 @@
                 </a:solidFill>
                 <a:latin typeface="Calibri"/>
               </a:rPr>
-              <a:t>3. Dependency 1: calculateGrades needs the marks produced by readPupilData, so reading must come first.</a:t>
-            </a:r>
-          </a:p>
-          <a:p>
-            <a:pPr lvl="1"/>
+              <a:t>Stock is only decremented after payment succeeds, so a failed payment leaves stock untouched.</a:t>
+            </a:r>
+          </a:p>
+          <a:p>
+            <a:pPr/>
             <a:r>
               <a:rPr sz="2000" b="0">
                 <a:solidFill>
@@ -3445,31 +3473,7 @@
                 </a:solidFill>
                 <a:latin typeface="Calibri"/>
               </a:rPr>
-              <a:t>4. Dependency 2: assembleReport needs the grades produced by calculateGrades, so it must come after.</a:t>
-            </a:r>
-          </a:p>
-          <a:p>
-            <a:pPr lvl="1"/>
-            <a:r>
-              <a:rPr sz="2000" b="0">
-                <a:solidFill>
-                  <a:srgbClr val="222222"/>
-                </a:solidFill>
-                <a:latin typeface="Calibri"/>
-              </a:rPr>
-              <a:t>5. Note flexibility: generateComments and some formatting could be reordered, but the grade-dependent steps cannot.</a:t>
-            </a:r>
-          </a:p>
-          <a:p>
-            <a:pPr lvl="1"/>
-            <a:r>
-              <a:rPr sz="2000" b="0">
-                <a:solidFill>
-                  <a:srgbClr val="222222"/>
-                </a:solidFill>
-                <a:latin typeface="Calibri"/>
-              </a:rPr>
-              <a:t>6. Conclusion: the order is fixed wherever a step consumes an earlier step's output.</a:t>
+              <a:t>Confirmation and receipt both depend on payment but are plausibly swappable with each other.</a:t>
             </a:r>
           </a:p>
         </p:txBody>
@@ -3529,7 +3533,7 @@
                 </a:solidFill>
                 <a:latin typeface="Calibri"/>
               </a:rPr>
-              <a:t>Your turn</a:t>
+              <a:t>Identifying sub-procedures for a scenario</a:t>
             </a:r>
           </a:p>
         </p:txBody>
@@ -3558,48 +3562,49 @@
           <a:p>
             <a:pPr/>
             <a:r>
-              <a:rPr sz="2400" b="1">
-                <a:solidFill>
-                  <a:srgbClr val="2B6CB0"/>
-                </a:solidFill>
-                <a:latin typeface="Calibri"/>
-              </a:rPr>
-              <a:t>Task</a:t>
-            </a:r>
-          </a:p>
-          <a:p>
-            <a:pPr lvl="1"/>
-            <a:r>
-              <a:rPr sz="2200" b="0">
-                <a:solidFill>
-                  <a:srgbClr val="222222"/>
-                </a:solidFill>
-                <a:latin typeface="Calibri"/>
-              </a:rPr>
-              <a:t>A developer is building a vending-machine program. Decompose it into at least three named sub-procedures, put them in a sensible order, and explain one pair of steps whose order is fixed because one depends on the other's output.</a:t>
-            </a:r>
-          </a:p>
-          <a:p>
-            <a:r>
-              <a:rPr sz="2400" b="1">
-                <a:solidFill>
-                  <a:srgbClr val="B76E00"/>
-                </a:solidFill>
-                <a:latin typeface="Calibri"/>
-              </a:rPr>
-              <a:t>Challenge / stretch</a:t>
-            </a:r>
-          </a:p>
-          <a:p>
-            <a:pPr lvl="1"/>
-            <a:r>
-              <a:rPr sz="2200" b="0">
-                <a:solidFill>
-                  <a:srgbClr val="222222"/>
-                </a:solidFill>
-                <a:latin typeface="Calibri"/>
-              </a:rPr>
-              <a:t>An ATM 'withdraw cash' task could in theory verify the PIN and read the requested amount at the same time. Identify which steps MUST stay sequential and which could be independent, justifying each with its data dependency (or lack of one).</a:t>
+              <a:rPr sz="2000" b="0">
+                <a:solidFill>
+                  <a:srgbClr val="222222"/>
+                </a:solidFill>
+                <a:latin typeface="Calibri"/>
+              </a:rPr>
+              <a:t>Walk the scenario chronologically and name a sub-procedure for each distinct job.</a:t>
+            </a:r>
+          </a:p>
+          <a:p>
+            <a:pPr/>
+            <a:r>
+              <a:rPr sz="2000" b="0">
+                <a:solidFill>
+                  <a:srgbClr val="222222"/>
+                </a:solidFill>
+                <a:latin typeface="Calibri"/>
+              </a:rPr>
+              <a:t>A cinema booking needs selectShowing, checkSeatAvailability, chooseSeats, takePayment, confirmBooking.</a:t>
+            </a:r>
+          </a:p>
+          <a:p>
+            <a:pPr/>
+            <a:r>
+              <a:rPr sz="2000" b="0">
+                <a:solidFill>
+                  <a:srgbClr val="222222"/>
+                </a:solidFill>
+                <a:latin typeface="Calibri"/>
+              </a:rPr>
+              <a:t>Each depends on the previous one's output: you cannot choose seats before knowing which are free.</a:t>
+            </a:r>
+          </a:p>
+          <a:p>
+            <a:pPr/>
+            <a:r>
+              <a:rPr sz="2000" b="0">
+                <a:solidFill>
+                  <a:srgbClr val="222222"/>
+                </a:solidFill>
+                <a:latin typeface="Calibri"/>
+              </a:rPr>
+              <a:t>Reused jobs such as takePayment should be one sub-procedure called from several places.</a:t>
             </a:r>
           </a:p>
         </p:txBody>
@@ -3659,7 +3664,7 @@
                 </a:solidFill>
                 <a:latin typeface="Calibri"/>
               </a:rPr>
-              <a:t>Exit ticket</a:t>
+              <a:t>Parameters make sub-procedures reusable</a:t>
             </a:r>
           </a:p>
         </p:txBody>
@@ -3686,36 +3691,135 @@
           </a:bodyPr>
           <a:lstStyle/>
           <a:p>
-            <a:r>
-              <a:rPr sz="2200" b="1">
-                <a:solidFill>
-                  <a:srgbClr val="222222"/>
-                </a:solidFill>
-                <a:latin typeface="Calibri"/>
-              </a:rPr>
-              <a:t>1. Why must 'check balance is sufficient' come before 'dispense the cash' in an ATM?</a:t>
-            </a:r>
-          </a:p>
-          <a:p>
-            <a:r>
-              <a:rPr sz="2200" b="1">
-                <a:solidFill>
-                  <a:srgbClr val="222222"/>
-                </a:solidFill>
-                <a:latin typeface="Calibri"/>
-              </a:rPr>
-              <a:t>2. A quiz game calls one shuffleQuestions sub-procedure each round. Why is that better than copying the code?</a:t>
-            </a:r>
-          </a:p>
-          <a:p>
-            <a:r>
-              <a:rPr sz="2200" b="1">
-                <a:solidFill>
-                  <a:srgbClr val="222222"/>
-                </a:solidFill>
-                <a:latin typeface="Calibri"/>
-              </a:rPr>
-              <a:t>3. State two advantages of sub-procedures over one long block of code.</a:t>
+            <a:pPr/>
+            <a:r>
+              <a:rPr sz="2000" b="0">
+                <a:solidFill>
+                  <a:srgbClr val="222222"/>
+                </a:solidFill>
+                <a:latin typeface="Calibri"/>
+              </a:rPr>
+              <a:t>A parameter is a value passed in so one sub-procedure serves many cases.</a:t>
+            </a:r>
+          </a:p>
+          <a:p>
+            <a:pPr/>
+            <a:r>
+              <a:rPr sz="2000" b="0">
+                <a:solidFill>
+                  <a:srgbClr val="222222"/>
+                </a:solidFill>
+                <a:latin typeface="Calibri"/>
+              </a:rPr>
+              <a:t>brew(strength, milk) makes every tea order use the same procedure with different arguments.</a:t>
+            </a:r>
+          </a:p>
+          <a:p>
+            <a:pPr/>
+            <a:r>
+              <a:rPr sz="2000" b="0">
+                <a:solidFill>
+                  <a:srgbClr val="222222"/>
+                </a:solidFill>
+                <a:latin typeface="Calibri"/>
+              </a:rPr>
+              <a:t>Without parameters you would duplicate near-identical code for each case.</a:t>
+            </a:r>
+          </a:p>
+          <a:p>
+            <a:pPr/>
+            <a:r>
+              <a:rPr sz="2000" b="0">
+                <a:solidFill>
+                  <a:srgbClr val="222222"/>
+                </a:solidFill>
+                <a:latin typeface="Calibri"/>
+              </a:rPr>
+              <a:t>This links procedural thinking to reusable components from thinking ahead.</a:t>
+            </a:r>
+          </a:p>
+          <a:p>
+            <a:pPr lvl="1"/>
+            <a:r>
+              <a:rPr sz="1600" b="0">
+                <a:solidFill>
+                  <a:srgbClr val="1A365D"/>
+                </a:solidFill>
+                <a:latin typeface="Consolas"/>
+              </a:rPr>
+              <a:t>procedure brew(strength, milk)</a:t>
+            </a:r>
+          </a:p>
+          <a:p>
+            <a:pPr lvl="1"/>
+            <a:r>
+              <a:rPr sz="1600" b="0">
+                <a:solidFill>
+                  <a:srgbClr val="1A365D"/>
+                </a:solidFill>
+                <a:latin typeface="Consolas"/>
+              </a:rPr>
+              <a:t>   wait(strength * 30)</a:t>
+            </a:r>
+          </a:p>
+          <a:p>
+            <a:pPr lvl="1"/>
+            <a:r>
+              <a:rPr sz="1600" b="0">
+                <a:solidFill>
+                  <a:srgbClr val="1A365D"/>
+                </a:solidFill>
+                <a:latin typeface="Consolas"/>
+              </a:rPr>
+              <a:t>   if milk == true then</a:t>
+            </a:r>
+          </a:p>
+          <a:p>
+            <a:pPr lvl="1"/>
+            <a:r>
+              <a:rPr sz="1600" b="0">
+                <a:solidFill>
+                  <a:srgbClr val="1A365D"/>
+                </a:solidFill>
+                <a:latin typeface="Consolas"/>
+              </a:rPr>
+              <a:t>      addMilk()</a:t>
+            </a:r>
+          </a:p>
+          <a:p>
+            <a:pPr lvl="1"/>
+            <a:r>
+              <a:rPr sz="1600" b="0">
+                <a:solidFill>
+                  <a:srgbClr val="1A365D"/>
+                </a:solidFill>
+                <a:latin typeface="Consolas"/>
+              </a:rPr>
+              <a:t>   endif</a:t>
+            </a:r>
+          </a:p>
+          <a:p>
+            <a:pPr lvl="1"/>
+            <a:r>
+              <a:rPr sz="1600" b="0">
+                <a:solidFill>
+                  <a:srgbClr val="1A365D"/>
+                </a:solidFill>
+                <a:latin typeface="Consolas"/>
+              </a:rPr>
+              <a:t>endprocedure</a:t>
+            </a:r>
+          </a:p>
+          <a:p>
+            <a:pPr lvl="1"/>
+            <a:r>
+              <a:rPr sz="1600" b="0">
+                <a:solidFill>
+                  <a:srgbClr val="1A365D"/>
+                </a:solidFill>
+                <a:latin typeface="Consolas"/>
+              </a:rPr>
+              <a:t>brew(2, true)</a:t>
             </a:r>
           </a:p>
         </p:txBody>
@@ -3775,7 +3879,7 @@
                 </a:solidFill>
                 <a:latin typeface="Calibri"/>
               </a:rPr>
-              <a:t>Exit ticket — answers</a:t>
+              <a:t>Benefits of a modular solution</a:t>
             </a:r>
           </a:p>
         </p:txBody>
@@ -3802,72 +3906,934 @@
           </a:bodyPr>
           <a:lstStyle/>
           <a:p>
+            <a:pPr/>
+            <a:r>
+              <a:rPr sz="2000" b="0">
+                <a:solidFill>
+                  <a:srgbClr val="222222"/>
+                </a:solidFill>
+                <a:latin typeface="Calibri"/>
+              </a:rPr>
+              <a:t>Modules can be shared between a team and developed in parallel.</a:t>
+            </a:r>
+          </a:p>
+          <a:p>
+            <a:pPr/>
+            <a:r>
+              <a:rPr sz="2000" b="0">
+                <a:solidFill>
+                  <a:srgbClr val="222222"/>
+                </a:solidFill>
+                <a:latin typeface="Calibri"/>
+              </a:rPr>
+              <a:t>Each module is tested in isolation, so errors are found and located faster.</a:t>
+            </a:r>
+          </a:p>
+          <a:p>
+            <a:pPr/>
+            <a:r>
+              <a:rPr sz="2000" b="0">
+                <a:solidFill>
+                  <a:srgbClr val="222222"/>
+                </a:solidFill>
+                <a:latin typeface="Calibri"/>
+              </a:rPr>
+              <a:t>Maintenance changes are confined to one module instead of rippling through the program.</a:t>
+            </a:r>
+          </a:p>
+          <a:p>
+            <a:pPr/>
+            <a:r>
+              <a:rPr sz="2000" b="0">
+                <a:solidFill>
+                  <a:srgbClr val="222222"/>
+                </a:solidFill>
+                <a:latin typeface="Calibri"/>
+              </a:rPr>
+              <a:t>Well-defined modules can be reused in other programs, saving development time.</a:t>
+            </a:r>
+          </a:p>
+        </p:txBody>
+      </p:sp>
+    </p:spTree>
+  </p:cSld>
+  <p:clrMapOvr>
+    <a:masterClrMapping/>
+  </p:clrMapOvr>
+</p:sld>
+</file>
+
+<file path=ppt/slides/slide15.xml><?xml version="1.0" encoding="utf-8"?>
+<p:sld xmlns:a="http://schemas.openxmlformats.org/drawingml/2006/main" xmlns:p="http://schemas.openxmlformats.org/presentationml/2006/main" xmlns:r="http://schemas.openxmlformats.org/officeDocument/2006/relationships">
+  <p:cSld>
+    <p:bg>
+      <p:bgPr>
+        <a:solidFill>
+          <a:srgbClr val="FFFFFF"/>
+        </a:solidFill>
+        <a:effectLst/>
+      </p:bgPr>
+    </p:bg>
+    <p:spTree>
+      <p:nvGrpSpPr>
+        <p:cNvPr id="1" name=""/>
+        <p:cNvGrpSpPr/>
+        <p:nvPr/>
+      </p:nvGrpSpPr>
+      <p:grpSpPr/>
+      <p:sp>
+        <p:nvSpPr>
+          <p:cNvPr id="2" name="TextBox 1"/>
+          <p:cNvSpPr txBox="1"/>
+          <p:nvPr/>
+        </p:nvSpPr>
+        <p:spPr>
+          <a:xfrm>
+            <a:off x="548640" y="274320"/>
+            <a:ext cx="11064240" cy="822960"/>
+          </a:xfrm>
+          <a:prstGeom prst="rect">
+            <a:avLst/>
+          </a:prstGeom>
+          <a:noFill/>
+        </p:spPr>
+        <p:txBody>
+          <a:bodyPr wrap="square">
+            <a:spAutoFit/>
+          </a:bodyPr>
+          <a:lstStyle/>
+          <a:p>
+            <a:r>
+              <a:rPr sz="3000" b="1" i="0">
+                <a:solidFill>
+                  <a:srgbClr val="2B6CB0"/>
+                </a:solidFill>
+                <a:latin typeface="Calibri"/>
+              </a:rPr>
+              <a:t>From decomposition to program structure</a:t>
+            </a:r>
+          </a:p>
+        </p:txBody>
+      </p:sp>
+      <p:sp>
+        <p:nvSpPr>
+          <p:cNvPr id="3" name="TextBox 2"/>
+          <p:cNvSpPr txBox="1"/>
+          <p:nvPr/>
+        </p:nvSpPr>
+        <p:spPr>
+          <a:xfrm>
+            <a:off x="640080" y="1280160"/>
+            <a:ext cx="10881360" cy="5120640"/>
+          </a:xfrm>
+          <a:prstGeom prst="rect">
+            <a:avLst/>
+          </a:prstGeom>
+          <a:noFill/>
+        </p:spPr>
+        <p:txBody>
+          <a:bodyPr wrap="square">
+            <a:spAutoFit/>
+          </a:bodyPr>
+          <a:lstStyle/>
+          <a:p>
+            <a:pPr/>
+            <a:r>
+              <a:rPr sz="2000" b="0">
+                <a:solidFill>
+                  <a:srgbClr val="222222"/>
+                </a:solidFill>
+                <a:latin typeface="Calibri"/>
+              </a:rPr>
+              <a:t>The decomposition becomes the program design: one sub-procedure per sub-problem.</a:t>
+            </a:r>
+          </a:p>
+          <a:p>
+            <a:pPr/>
+            <a:r>
+              <a:rPr sz="2000" b="0">
+                <a:solidFill>
+                  <a:srgbClr val="222222"/>
+                </a:solidFill>
+                <a:latin typeface="Calibri"/>
+              </a:rPr>
+              <a:t>The main program calls them in dependency order.</a:t>
+            </a:r>
+          </a:p>
+          <a:p>
+            <a:pPr/>
+            <a:r>
+              <a:rPr sz="2000" b="0">
+                <a:solidFill>
+                  <a:srgbClr val="222222"/>
+                </a:solidFill>
+                <a:latin typeface="Calibri"/>
+              </a:rPr>
+              <a:t>Modules that must exchange data need an agreed interface before both are built.</a:t>
+            </a:r>
+          </a:p>
+          <a:p>
+            <a:pPr/>
+            <a:r>
+              <a:rPr sz="2000" b="0">
+                <a:solidFill>
+                  <a:srgbClr val="222222"/>
+                </a:solidFill>
+                <a:latin typeface="Calibri"/>
+              </a:rPr>
+              <a:t>Dependency, not preference, dictates the build and call order.</a:t>
+            </a:r>
+          </a:p>
+          <a:p>
+            <a:pPr lvl="1"/>
+            <a:r>
+              <a:rPr sz="1600" b="0">
+                <a:solidFill>
+                  <a:srgbClr val="1A365D"/>
+                </a:solidFill>
+                <a:latin typeface="Consolas"/>
+              </a:rPr>
+              <a:t>procedure makeTea()</a:t>
+            </a:r>
+          </a:p>
+          <a:p>
+            <a:pPr lvl="1"/>
+            <a:r>
+              <a:rPr sz="1600" b="0">
+                <a:solidFill>
+                  <a:srgbClr val="1A365D"/>
+                </a:solidFill>
+                <a:latin typeface="Consolas"/>
+              </a:rPr>
+              <a:t>   fetchItems()</a:t>
+            </a:r>
+          </a:p>
+          <a:p>
+            <a:pPr lvl="1"/>
+            <a:r>
+              <a:rPr sz="1600" b="0">
+                <a:solidFill>
+                  <a:srgbClr val="1A365D"/>
+                </a:solidFill>
+                <a:latin typeface="Consolas"/>
+              </a:rPr>
+              <a:t>   boilWater()</a:t>
+            </a:r>
+          </a:p>
+          <a:p>
+            <a:pPr lvl="1"/>
+            <a:r>
+              <a:rPr sz="1600" b="0">
+                <a:solidFill>
+                  <a:srgbClr val="1A365D"/>
+                </a:solidFill>
+                <a:latin typeface="Consolas"/>
+              </a:rPr>
+              <a:t>   brew(2, true)</a:t>
+            </a:r>
+          </a:p>
+          <a:p>
+            <a:pPr lvl="1"/>
+            <a:r>
+              <a:rPr sz="1600" b="0">
+                <a:solidFill>
+                  <a:srgbClr val="1A365D"/>
+                </a:solidFill>
+                <a:latin typeface="Consolas"/>
+              </a:rPr>
+              <a:t>   addExtras()</a:t>
+            </a:r>
+          </a:p>
+          <a:p>
+            <a:pPr lvl="1"/>
+            <a:r>
+              <a:rPr sz="1600" b="0">
+                <a:solidFill>
+                  <a:srgbClr val="1A365D"/>
+                </a:solidFill>
+                <a:latin typeface="Consolas"/>
+              </a:rPr>
+              <a:t>endprocedure</a:t>
+            </a:r>
+          </a:p>
+        </p:txBody>
+      </p:sp>
+    </p:spTree>
+  </p:cSld>
+  <p:clrMapOvr>
+    <a:masterClrMapping/>
+  </p:clrMapOvr>
+</p:sld>
+</file>
+
+<file path=ppt/slides/slide16.xml><?xml version="1.0" encoding="utf-8"?>
+<p:sld xmlns:a="http://schemas.openxmlformats.org/drawingml/2006/main" xmlns:p="http://schemas.openxmlformats.org/presentationml/2006/main" xmlns:r="http://schemas.openxmlformats.org/officeDocument/2006/relationships">
+  <p:cSld>
+    <p:bg>
+      <p:bgPr>
+        <a:solidFill>
+          <a:srgbClr val="FFFFFF"/>
+        </a:solidFill>
+        <a:effectLst/>
+      </p:bgPr>
+    </p:bg>
+    <p:spTree>
+      <p:nvGrpSpPr>
+        <p:cNvPr id="1" name=""/>
+        <p:cNvGrpSpPr/>
+        <p:nvPr/>
+      </p:nvGrpSpPr>
+      <p:grpSpPr/>
+      <p:sp>
+        <p:nvSpPr>
+          <p:cNvPr id="2" name="TextBox 1"/>
+          <p:cNvSpPr txBox="1"/>
+          <p:nvPr/>
+        </p:nvSpPr>
+        <p:spPr>
+          <a:xfrm>
+            <a:off x="548640" y="274320"/>
+            <a:ext cx="11064240" cy="822960"/>
+          </a:xfrm>
+          <a:prstGeom prst="rect">
+            <a:avLst/>
+          </a:prstGeom>
+          <a:noFill/>
+        </p:spPr>
+        <p:txBody>
+          <a:bodyPr wrap="square">
+            <a:spAutoFit/>
+          </a:bodyPr>
+          <a:lstStyle/>
+          <a:p>
+            <a:r>
+              <a:rPr sz="3000" b="1" i="0">
+                <a:solidFill>
+                  <a:srgbClr val="2B6CB0"/>
+                </a:solidFill>
+                <a:latin typeface="Calibri"/>
+              </a:rPr>
+              <a:t>Worked example 1</a:t>
+            </a:r>
+          </a:p>
+        </p:txBody>
+      </p:sp>
+      <p:sp>
+        <p:nvSpPr>
+          <p:cNvPr id="3" name="TextBox 2"/>
+          <p:cNvSpPr txBox="1"/>
+          <p:nvPr/>
+        </p:nvSpPr>
+        <p:spPr>
+          <a:xfrm>
+            <a:off x="640080" y="1280160"/>
+            <a:ext cx="10881360" cy="5120640"/>
+          </a:xfrm>
+          <a:prstGeom prst="rect">
+            <a:avLst/>
+          </a:prstGeom>
+          <a:noFill/>
+        </p:spPr>
+        <p:txBody>
+          <a:bodyPr wrap="square">
+            <a:spAutoFit/>
+          </a:bodyPr>
+          <a:lstStyle/>
+          <a:p>
+            <a:pPr/>
             <a:r>
               <a:rPr sz="2200" b="1">
                 <a:solidFill>
-                  <a:srgbClr val="222222"/>
-                </a:solidFill>
-                <a:latin typeface="Calibri"/>
-              </a:rPr>
-              <a:t>1. Why must 'check balance is sufficient' come before 'dispense the cash' in an ATM?</a:t>
+                  <a:srgbClr val="2B6CB0"/>
+                </a:solidFill>
+                <a:latin typeface="Calibri"/>
+              </a:rPr>
+              <a:t>Decomposing an online cinema booking system</a:t>
             </a:r>
           </a:p>
           <a:p>
             <a:pPr lvl="1"/>
             <a:r>
-              <a:rPr sz="1800" i="1">
+              <a:rPr sz="1900" b="0">
+                <a:solidFill>
+                  <a:srgbClr val="222222"/>
+                </a:solidFill>
+                <a:latin typeface="Calibri"/>
+              </a:rPr>
+              <a:t>1. State the whole problem: let a customer book and pay for cinema seats online.</a:t>
+            </a:r>
+          </a:p>
+          <a:p>
+            <a:pPr lvl="1"/>
+            <a:r>
+              <a:rPr sz="1900" b="0">
+                <a:solidFill>
+                  <a:srgbClr val="222222"/>
+                </a:solidFill>
+                <a:latin typeface="Calibri"/>
+              </a:rPr>
+              <a:t>2. Identify component 1: selectFilmAndShowtime, choosing film, date and time.</a:t>
+            </a:r>
+          </a:p>
+          <a:p>
+            <a:pPr lvl="1"/>
+            <a:r>
+              <a:rPr sz="1900" b="0">
+                <a:solidFill>
+                  <a:srgbClr val="222222"/>
+                </a:solidFill>
+                <a:latin typeface="Calibri"/>
+              </a:rPr>
+              <a:t>3. Identify component 2: checkSeatAvailability, which depends on step 1's output, the chosen showing.</a:t>
+            </a:r>
+          </a:p>
+          <a:p>
+            <a:pPr lvl="1"/>
+            <a:r>
+              <a:rPr sz="1900" b="0">
+                <a:solidFill>
+                  <a:srgbClr val="222222"/>
+                </a:solidFill>
+                <a:latin typeface="Calibri"/>
+              </a:rPr>
+              <a:t>4. Identify component 3: chooseSeats, which depends on step 2, since only free seats may be offered.</a:t>
+            </a:r>
+          </a:p>
+          <a:p>
+            <a:pPr lvl="1"/>
+            <a:r>
+              <a:rPr sz="1900" b="0">
+                <a:solidFill>
+                  <a:srgbClr val="222222"/>
+                </a:solidFill>
+                <a:latin typeface="Calibri"/>
+              </a:rPr>
+              <a:t>5. Identify component 4: takePayment, which depends on step 3 to know the number of seats and price.</a:t>
+            </a:r>
+          </a:p>
+          <a:p>
+            <a:pPr lvl="1"/>
+            <a:r>
+              <a:rPr sz="1900" b="0">
+                <a:solidFill>
+                  <a:srgbClr val="222222"/>
+                </a:solidFill>
+                <a:latin typeface="Calibri"/>
+              </a:rPr>
+              <a:t>6. Identify component 5: confirmBookingAndUpdateSeatMap, which depends on step 4: only confirm once paid.</a:t>
+            </a:r>
+          </a:p>
+          <a:p>
+            <a:pPr lvl="1"/>
+            <a:r>
+              <a:rPr sz="1900" b="0">
+                <a:solidFill>
+                  <a:srgbClr val="222222"/>
+                </a:solidFill>
+                <a:latin typeface="Calibri"/>
+              </a:rPr>
+              <a:t>7. Conclude: the data dependencies fix the order, and takePayment is reusable elsewhere on the site.</a:t>
+            </a:r>
+          </a:p>
+        </p:txBody>
+      </p:sp>
+    </p:spTree>
+  </p:cSld>
+  <p:clrMapOvr>
+    <a:masterClrMapping/>
+  </p:clrMapOvr>
+</p:sld>
+</file>
+
+<file path=ppt/slides/slide17.xml><?xml version="1.0" encoding="utf-8"?>
+<p:sld xmlns:a="http://schemas.openxmlformats.org/drawingml/2006/main" xmlns:p="http://schemas.openxmlformats.org/presentationml/2006/main" xmlns:r="http://schemas.openxmlformats.org/officeDocument/2006/relationships">
+  <p:cSld>
+    <p:bg>
+      <p:bgPr>
+        <a:solidFill>
+          <a:srgbClr val="FFFFFF"/>
+        </a:solidFill>
+        <a:effectLst/>
+      </p:bgPr>
+    </p:bg>
+    <p:spTree>
+      <p:nvGrpSpPr>
+        <p:cNvPr id="1" name=""/>
+        <p:cNvGrpSpPr/>
+        <p:nvPr/>
+      </p:nvGrpSpPr>
+      <p:grpSpPr/>
+      <p:sp>
+        <p:nvSpPr>
+          <p:cNvPr id="2" name="TextBox 1"/>
+          <p:cNvSpPr txBox="1"/>
+          <p:nvPr/>
+        </p:nvSpPr>
+        <p:spPr>
+          <a:xfrm>
+            <a:off x="548640" y="274320"/>
+            <a:ext cx="11064240" cy="822960"/>
+          </a:xfrm>
+          <a:prstGeom prst="rect">
+            <a:avLst/>
+          </a:prstGeom>
+          <a:noFill/>
+        </p:spPr>
+        <p:txBody>
+          <a:bodyPr wrap="square">
+            <a:spAutoFit/>
+          </a:bodyPr>
+          <a:lstStyle/>
+          <a:p>
+            <a:r>
+              <a:rPr sz="3000" b="1" i="0">
+                <a:solidFill>
+                  <a:srgbClr val="2B6CB0"/>
+                </a:solidFill>
+                <a:latin typeface="Calibri"/>
+              </a:rPr>
+              <a:t>Worked example 2</a:t>
+            </a:r>
+          </a:p>
+        </p:txBody>
+      </p:sp>
+      <p:sp>
+        <p:nvSpPr>
+          <p:cNvPr id="3" name="TextBox 2"/>
+          <p:cNvSpPr txBox="1"/>
+          <p:nvPr/>
+        </p:nvSpPr>
+        <p:spPr>
+          <a:xfrm>
+            <a:off x="640080" y="1280160"/>
+            <a:ext cx="10881360" cy="5120640"/>
+          </a:xfrm>
+          <a:prstGeom prst="rect">
+            <a:avLst/>
+          </a:prstGeom>
+          <a:noFill/>
+        </p:spPr>
+        <p:txBody>
+          <a:bodyPr wrap="square">
+            <a:spAutoFit/>
+          </a:bodyPr>
+          <a:lstStyle/>
+          <a:p>
+            <a:pPr/>
+            <a:r>
+              <a:rPr sz="2200" b="1">
+                <a:solidFill>
+                  <a:srgbClr val="2B6CB0"/>
+                </a:solidFill>
+                <a:latin typeface="Calibri"/>
+              </a:rPr>
+              <a:t>Justifying the order of steps in a login process</a:t>
+            </a:r>
+          </a:p>
+          <a:p>
+            <a:pPr lvl="1"/>
+            <a:r>
+              <a:rPr sz="1900" b="0">
+                <a:solidFill>
+                  <a:srgbClr val="222222"/>
+                </a:solidFill>
+                <a:latin typeface="Calibri"/>
+              </a:rPr>
+              <a:t>1. List the steps: display login form, user enters details, look up username, compare password hash, create session, show dashboard.</a:t>
+            </a:r>
+          </a:p>
+          <a:p>
+            <a:pPr lvl="1"/>
+            <a:r>
+              <a:rPr sz="1900" b="0">
+                <a:solidFill>
+                  <a:srgbClr val="222222"/>
+                </a:solidFill>
+                <a:latin typeface="Calibri"/>
+              </a:rPr>
+              <a:t>2. Look up username must follow entry of details: it consumes the typed username.</a:t>
+            </a:r>
+          </a:p>
+          <a:p>
+            <a:pPr lvl="1"/>
+            <a:r>
+              <a:rPr sz="1900" b="0">
+                <a:solidFill>
+                  <a:srgbClr val="222222"/>
+                </a:solidFill>
+                <a:latin typeface="Calibri"/>
+              </a:rPr>
+              <a:t>3. Compare password hash must follow the lookup: it needs the stored hash that the lookup retrieves.</a:t>
+            </a:r>
+          </a:p>
+          <a:p>
+            <a:pPr lvl="1"/>
+            <a:r>
+              <a:rPr sz="1900" b="0">
+                <a:solidFill>
+                  <a:srgbClr val="222222"/>
+                </a:solidFill>
+                <a:latin typeface="Calibri"/>
+              </a:rPr>
+              <a:t>4. Create session must follow a successful comparison: an unverified user must not get a session.</a:t>
+            </a:r>
+          </a:p>
+          <a:p>
+            <a:pPr lvl="1"/>
+            <a:r>
+              <a:rPr sz="1900" b="0">
+                <a:solidFill>
+                  <a:srgbClr val="222222"/>
+                </a:solidFill>
+                <a:latin typeface="Calibri"/>
+              </a:rPr>
+              <a:t>5. Show dashboard must follow session creation: the page is only for authenticated users.</a:t>
+            </a:r>
+          </a:p>
+          <a:p>
+            <a:pPr lvl="1"/>
+            <a:r>
+              <a:rPr sz="1900" b="0">
+                <a:solidFill>
+                  <a:srgbClr val="222222"/>
+                </a:solidFill>
+                <a:latin typeface="Calibri"/>
+              </a:rPr>
+              <a:t>6. Conclude: every adjacent pair is a must-follow dependency, so this sequence cannot be reordered.</a:t>
+            </a:r>
+          </a:p>
+        </p:txBody>
+      </p:sp>
+    </p:spTree>
+  </p:cSld>
+  <p:clrMapOvr>
+    <a:masterClrMapping/>
+  </p:clrMapOvr>
+</p:sld>
+</file>
+
+<file path=ppt/slides/slide18.xml><?xml version="1.0" encoding="utf-8"?>
+<p:sld xmlns:a="http://schemas.openxmlformats.org/drawingml/2006/main" xmlns:p="http://schemas.openxmlformats.org/presentationml/2006/main" xmlns:r="http://schemas.openxmlformats.org/officeDocument/2006/relationships">
+  <p:cSld>
+    <p:bg>
+      <p:bgPr>
+        <a:solidFill>
+          <a:srgbClr val="FFFFFF"/>
+        </a:solidFill>
+        <a:effectLst/>
+      </p:bgPr>
+    </p:bg>
+    <p:spTree>
+      <p:nvGrpSpPr>
+        <p:cNvPr id="1" name=""/>
+        <p:cNvGrpSpPr/>
+        <p:nvPr/>
+      </p:nvGrpSpPr>
+      <p:grpSpPr/>
+      <p:sp>
+        <p:nvSpPr>
+          <p:cNvPr id="2" name="TextBox 1"/>
+          <p:cNvSpPr txBox="1"/>
+          <p:nvPr/>
+        </p:nvSpPr>
+        <p:spPr>
+          <a:xfrm>
+            <a:off x="548640" y="274320"/>
+            <a:ext cx="11064240" cy="822960"/>
+          </a:xfrm>
+          <a:prstGeom prst="rect">
+            <a:avLst/>
+          </a:prstGeom>
+          <a:noFill/>
+        </p:spPr>
+        <p:txBody>
+          <a:bodyPr wrap="square">
+            <a:spAutoFit/>
+          </a:bodyPr>
+          <a:lstStyle/>
+          <a:p>
+            <a:r>
+              <a:rPr sz="3000" b="1" i="0">
+                <a:solidFill>
+                  <a:srgbClr val="2B6CB0"/>
+                </a:solidFill>
+                <a:latin typeface="Calibri"/>
+              </a:rPr>
+              <a:t>Worked example 3</a:t>
+            </a:r>
+          </a:p>
+        </p:txBody>
+      </p:sp>
+      <p:sp>
+        <p:nvSpPr>
+          <p:cNvPr id="3" name="TextBox 2"/>
+          <p:cNvSpPr txBox="1"/>
+          <p:nvPr/>
+        </p:nvSpPr>
+        <p:spPr>
+          <a:xfrm>
+            <a:off x="640080" y="1280160"/>
+            <a:ext cx="10881360" cy="5120640"/>
+          </a:xfrm>
+          <a:prstGeom prst="rect">
+            <a:avLst/>
+          </a:prstGeom>
+          <a:noFill/>
+        </p:spPr>
+        <p:txBody>
+          <a:bodyPr wrap="square">
+            <a:spAutoFit/>
+          </a:bodyPr>
+          <a:lstStyle/>
+          <a:p>
+            <a:pPr/>
+            <a:r>
+              <a:rPr sz="2200" b="1">
+                <a:solidFill>
+                  <a:srgbClr val="2B6CB0"/>
+                </a:solidFill>
+                <a:latin typeface="Calibri"/>
+              </a:rPr>
+              <a:t>Turning a decomposition into parameterised procedures</a:t>
+            </a:r>
+          </a:p>
+          <a:p>
+            <a:pPr lvl="1"/>
+            <a:r>
+              <a:rPr sz="1900" b="0">
+                <a:solidFill>
+                  <a:srgbClr val="222222"/>
+                </a:solidFill>
+                <a:latin typeface="Calibri"/>
+              </a:rPr>
+              <a:t>1. Decompose making tea into fetchItems, boilWater, brew and addExtras.</a:t>
+            </a:r>
+          </a:p>
+          <a:p>
+            <a:pPr lvl="1"/>
+            <a:r>
+              <a:rPr sz="1900" b="0">
+                <a:solidFill>
+                  <a:srgbClr val="222222"/>
+                </a:solidFill>
+                <a:latin typeface="Calibri"/>
+              </a:rPr>
+              <a:t>2. Note the dependencies: brew needs both the fetched mug and the boiled water; addExtras needs a brewed cup.</a:t>
+            </a:r>
+          </a:p>
+          <a:p>
+            <a:pPr lvl="1"/>
+            <a:r>
+              <a:rPr sz="1900" b="0">
+                <a:solidFill>
+                  <a:srgbClr val="222222"/>
+                </a:solidFill>
+                <a:latin typeface="Calibri"/>
+              </a:rPr>
+              <a:t>3. Note the independence: fetchItems and boilWater share no data, so their relative order is free.</a:t>
+            </a:r>
+          </a:p>
+          <a:p>
+            <a:pPr lvl="1"/>
+            <a:r>
+              <a:rPr sz="1900" b="0">
+                <a:solidFill>
+                  <a:srgbClr val="222222"/>
+                </a:solidFill>
+                <a:latin typeface="Calibri"/>
+              </a:rPr>
+              <a:t>4. Generalise brew with parameters strength and milk so one procedure serves every order.</a:t>
+            </a:r>
+          </a:p>
+          <a:p>
+            <a:pPr lvl="1"/>
+            <a:r>
+              <a:rPr sz="1900" b="0">
+                <a:solidFill>
+                  <a:srgbClr val="222222"/>
+                </a:solidFill>
+                <a:latin typeface="Calibri"/>
+              </a:rPr>
+              <a:t>5. Write the main program as ordered calls: fetchItems, boilWater, brew(2, true), addExtras.</a:t>
+            </a:r>
+          </a:p>
+          <a:p>
+            <a:pPr lvl="1"/>
+            <a:r>
+              <a:rPr sz="1900" b="0">
+                <a:solidFill>
+                  <a:srgbClr val="222222"/>
+                </a:solidFill>
+                <a:latin typeface="Calibri"/>
+              </a:rPr>
+              <a:t>6. Check each call against its dependencies: everything each procedure consumes is produced by an earlier call.</a:t>
+            </a:r>
+          </a:p>
+        </p:txBody>
+      </p:sp>
+    </p:spTree>
+  </p:cSld>
+  <p:clrMapOvr>
+    <a:masterClrMapping/>
+  </p:clrMapOvr>
+</p:sld>
+</file>
+
+<file path=ppt/slides/slide19.xml><?xml version="1.0" encoding="utf-8"?>
+<p:sld xmlns:a="http://schemas.openxmlformats.org/drawingml/2006/main" xmlns:p="http://schemas.openxmlformats.org/presentationml/2006/main" xmlns:r="http://schemas.openxmlformats.org/officeDocument/2006/relationships">
+  <p:cSld>
+    <p:bg>
+      <p:bgPr>
+        <a:solidFill>
+          <a:srgbClr val="FFFFFF"/>
+        </a:solidFill>
+        <a:effectLst/>
+      </p:bgPr>
+    </p:bg>
+    <p:spTree>
+      <p:nvGrpSpPr>
+        <p:cNvPr id="1" name=""/>
+        <p:cNvGrpSpPr/>
+        <p:nvPr/>
+      </p:nvGrpSpPr>
+      <p:grpSpPr/>
+      <p:sp>
+        <p:nvSpPr>
+          <p:cNvPr id="2" name="TextBox 1"/>
+          <p:cNvSpPr txBox="1"/>
+          <p:nvPr/>
+        </p:nvSpPr>
+        <p:spPr>
+          <a:xfrm>
+            <a:off x="548640" y="274320"/>
+            <a:ext cx="11064240" cy="822960"/>
+          </a:xfrm>
+          <a:prstGeom prst="rect">
+            <a:avLst/>
+          </a:prstGeom>
+          <a:noFill/>
+        </p:spPr>
+        <p:txBody>
+          <a:bodyPr wrap="square">
+            <a:spAutoFit/>
+          </a:bodyPr>
+          <a:lstStyle/>
+          <a:p>
+            <a:r>
+              <a:rPr sz="3000" b="1" i="0">
+                <a:solidFill>
+                  <a:srgbClr val="2B6CB0"/>
+                </a:solidFill>
+                <a:latin typeface="Calibri"/>
+              </a:rPr>
+              <a:t>Activity 1</a:t>
+            </a:r>
+          </a:p>
+        </p:txBody>
+      </p:sp>
+      <p:sp>
+        <p:nvSpPr>
+          <p:cNvPr id="3" name="TextBox 2"/>
+          <p:cNvSpPr txBox="1"/>
+          <p:nvPr/>
+        </p:nvSpPr>
+        <p:spPr>
+          <a:xfrm>
+            <a:off x="640080" y="1280160"/>
+            <a:ext cx="10881360" cy="5120640"/>
+          </a:xfrm>
+          <a:prstGeom prst="rect">
+            <a:avLst/>
+          </a:prstGeom>
+          <a:noFill/>
+        </p:spPr>
+        <p:txBody>
+          <a:bodyPr wrap="square">
+            <a:spAutoFit/>
+          </a:bodyPr>
+          <a:lstStyle/>
+          <a:p>
+            <a:pPr/>
+            <a:r>
+              <a:rPr sz="2200" b="1">
+                <a:solidFill>
+                  <a:srgbClr val="2B6CB0"/>
+                </a:solidFill>
+                <a:latin typeface="Calibri"/>
+              </a:rPr>
+              <a:t>Tea-Bot 3000  (25 min)</a:t>
+            </a:r>
+          </a:p>
+          <a:p>
+            <a:pPr lvl="1"/>
+            <a:r>
+              <a:rPr sz="2000" b="0">
+                <a:solidFill>
+                  <a:srgbClr val="222222"/>
+                </a:solidFill>
+                <a:latin typeface="Calibri"/>
+              </a:rPr>
+              <a:t>Brief the class: write instructions so a robot that has never seen tea makes a cup; it executes literally, in order, and halts with an error on anything ambiguous or impossible.</a:t>
+            </a:r>
+          </a:p>
+          <a:p>
+            <a:pPr lvl="1"/>
+            <a:r>
+              <a:rPr sz="2000" b="0">
+                <a:solidFill>
+                  <a:srgbClr val="222222"/>
+                </a:solidFill>
+                <a:latin typeface="Calibri"/>
+              </a:rPr>
+              <a:t>Pairs write their instruction list in six minutes.</a:t>
+            </a:r>
+          </a:p>
+          <a:p>
+            <a:pPr lvl="1"/>
+            <a:r>
+              <a:rPr sz="2000" b="0">
+                <a:solidFill>
+                  <a:srgbClr val="222222"/>
+                </a:solidFill>
+                <a:latin typeface="Calibri"/>
+              </a:rPr>
+              <a:t>Run submissions at the front with malicious literalness: put the teabag in the mug before any mug is fetched fails; boil an empty kettle boils dry; add milk empties the whole carton.</a:t>
+            </a:r>
+          </a:p>
+          <a:p>
+            <a:pPr lvl="1"/>
+            <a:r>
+              <a:rPr sz="2000" b="0">
+                <a:solidFill>
+                  <a:srgbClr val="222222"/>
+                </a:solidFill>
+                <a:latin typeface="Calibri"/>
+              </a:rPr>
+              <a:t>After two or three crashes, name the fixes the class is discovering: decompose into sub-procedures such as fetchItems, boilWater, brew and addExtras, each with precise ordered steps and noted dependencies.</a:t>
+            </a:r>
+          </a:p>
+          <a:p>
+            <a:pPr lvl="1"/>
+            <a:r>
+              <a:rPr sz="2000" b="0">
+                <a:solidFill>
+                  <a:srgbClr val="222222"/>
+                </a:solidFill>
+                <a:latin typeface="Calibri"/>
+              </a:rPr>
+              <a:t>Pairs revise into named sub-procedures with an explicit calling order; run the best attempt to a successful cup.</a:t>
+            </a:r>
+          </a:p>
+          <a:p>
+            <a:pPr/>
+            <a:r>
+              <a:rPr sz="1800" b="0">
                 <a:solidFill>
                   <a:srgbClr val="B76E00"/>
                 </a:solidFill>
                 <a:latin typeface="Calibri"/>
               </a:rPr>
-              <a:t>Answer: Dispensing depends on the output of the balance check; you cannot safely dispense until funds are confirmed.</a:t>
-            </a:r>
-          </a:p>
-          <a:p>
-            <a:r>
-              <a:rPr sz="2200" b="1">
-                <a:solidFill>
-                  <a:srgbClr val="222222"/>
-                </a:solidFill>
-                <a:latin typeface="Calibri"/>
-              </a:rPr>
-              <a:t>2. A quiz game calls one shuffleQuestions sub-procedure each round. Why is that better than copying the code?</a:t>
-            </a:r>
-          </a:p>
-          <a:p>
-            <a:pPr lvl="1"/>
-            <a:r>
-              <a:rPr sz="1800" i="1">
-                <a:solidFill>
-                  <a:srgbClr val="B76E00"/>
-                </a:solidFill>
-                <a:latin typeface="Calibri"/>
-              </a:rPr>
-              <a:t>Answer: It is defined once and reused, so any fix is made in one place and all rounds behave consistently.</a:t>
-            </a:r>
-          </a:p>
-          <a:p>
-            <a:r>
-              <a:rPr sz="2200" b="1">
-                <a:solidFill>
-                  <a:srgbClr val="222222"/>
-                </a:solidFill>
-                <a:latin typeface="Calibri"/>
-              </a:rPr>
-              <a:t>3. State two advantages of sub-procedures over one long block of code.</a:t>
-            </a:r>
-          </a:p>
-          <a:p>
-            <a:pPr lvl="1"/>
-            <a:r>
-              <a:rPr sz="1800" i="1">
-                <a:solidFill>
-                  <a:srgbClr val="B76E00"/>
-                </a:solidFill>
-                <a:latin typeface="Calibri"/>
-              </a:rPr>
-              <a:t>Answer: Easier to test/debug in isolation and reusable from many places; also easier to share among a team and to maintain.</a:t>
+              <a:t>Stretch: Add parameters: rewrite brew to take strength and milk so one sub-procedure serves every order, a reusable generalised component.</a:t>
             </a:r>
           </a:p>
         </p:txBody>
@@ -3974,7 +4940,7 @@
                 </a:solidFill>
                 <a:latin typeface="Calibri"/>
               </a:rPr>
-              <a:t>Decompose a problem into named sub-procedures, each performing one task.</a:t>
+              <a:t>Identify the components of a problem and decompose it into smaller sub-problems.</a:t>
             </a:r>
           </a:p>
           <a:p>
@@ -3986,7 +4952,7 @@
                 </a:solidFill>
                 <a:latin typeface="Calibri"/>
               </a:rPr>
-              <a:t>Determine the fixed order of steps by identifying data dependencies between them.</a:t>
+              <a:t>Identify the components of a solution as named sub-procedures, each doing one clear job.</a:t>
             </a:r>
           </a:p>
           <a:p>
@@ -3998,7 +4964,1465 @@
                 </a:solidFill>
                 <a:latin typeface="Calibri"/>
               </a:rPr>
-              <a:t>Apply procedural thinking to sequence an unseen scenario and justify why the order is fixed.</a:t>
+              <a:t>Determine and justify the order of steps needed to solve a problem using data dependencies.</a:t>
+            </a:r>
+          </a:p>
+          <a:p>
+            <a:pPr lvl="1"/>
+            <a:r>
+              <a:rPr sz="2200" b="0">
+                <a:solidFill>
+                  <a:srgbClr val="222222"/>
+                </a:solidFill>
+                <a:latin typeface="Calibri"/>
+              </a:rPr>
+              <a:t>Explain the benefits of a modular, procedural solution for building, testing and maintenance.</a:t>
+            </a:r>
+          </a:p>
+        </p:txBody>
+      </p:sp>
+    </p:spTree>
+  </p:cSld>
+  <p:clrMapOvr>
+    <a:masterClrMapping/>
+  </p:clrMapOvr>
+</p:sld>
+</file>
+
+<file path=ppt/slides/slide20.xml><?xml version="1.0" encoding="utf-8"?>
+<p:sld xmlns:a="http://schemas.openxmlformats.org/drawingml/2006/main" xmlns:p="http://schemas.openxmlformats.org/presentationml/2006/main" xmlns:r="http://schemas.openxmlformats.org/officeDocument/2006/relationships">
+  <p:cSld>
+    <p:bg>
+      <p:bgPr>
+        <a:solidFill>
+          <a:srgbClr val="FFFFFF"/>
+        </a:solidFill>
+        <a:effectLst/>
+      </p:bgPr>
+    </p:bg>
+    <p:spTree>
+      <p:nvGrpSpPr>
+        <p:cNvPr id="1" name=""/>
+        <p:cNvGrpSpPr/>
+        <p:nvPr/>
+      </p:nvGrpSpPr>
+      <p:grpSpPr/>
+      <p:sp>
+        <p:nvSpPr>
+          <p:cNvPr id="2" name="TextBox 1"/>
+          <p:cNvSpPr txBox="1"/>
+          <p:nvPr/>
+        </p:nvSpPr>
+        <p:spPr>
+          <a:xfrm>
+            <a:off x="548640" y="274320"/>
+            <a:ext cx="11064240" cy="822960"/>
+          </a:xfrm>
+          <a:prstGeom prst="rect">
+            <a:avLst/>
+          </a:prstGeom>
+          <a:noFill/>
+        </p:spPr>
+        <p:txBody>
+          <a:bodyPr wrap="square">
+            <a:spAutoFit/>
+          </a:bodyPr>
+          <a:lstStyle/>
+          <a:p>
+            <a:r>
+              <a:rPr sz="3000" b="1" i="0">
+                <a:solidFill>
+                  <a:srgbClr val="2B6CB0"/>
+                </a:solidFill>
+                <a:latin typeface="Calibri"/>
+              </a:rPr>
+              <a:t>Activity 2</a:t>
+            </a:r>
+          </a:p>
+        </p:txBody>
+      </p:sp>
+      <p:sp>
+        <p:nvSpPr>
+          <p:cNvPr id="3" name="TextBox 2"/>
+          <p:cNvSpPr txBox="1"/>
+          <p:nvPr/>
+        </p:nvSpPr>
+        <p:spPr>
+          <a:xfrm>
+            <a:off x="640080" y="1280160"/>
+            <a:ext cx="10881360" cy="5120640"/>
+          </a:xfrm>
+          <a:prstGeom prst="rect">
+            <a:avLst/>
+          </a:prstGeom>
+          <a:noFill/>
+        </p:spPr>
+        <p:txBody>
+          <a:bodyPr wrap="square">
+            <a:spAutoFit/>
+          </a:bodyPr>
+          <a:lstStyle/>
+          <a:p>
+            <a:pPr/>
+            <a:r>
+              <a:rPr sz="2200" b="1">
+                <a:solidFill>
+                  <a:srgbClr val="2B6CB0"/>
+                </a:solidFill>
+                <a:latin typeface="Calibri"/>
+              </a:rPr>
+              <a:t>Human sequencer: order matters  (15 min)</a:t>
+            </a:r>
+          </a:p>
+          <a:p>
+            <a:pPr lvl="1"/>
+            <a:r>
+              <a:rPr sz="2000" b="0">
+                <a:solidFill>
+                  <a:srgbClr val="222222"/>
+                </a:solidFill>
+                <a:latin typeface="Calibri"/>
+              </a:rPr>
+              <a:t>Give each group shuffled step cards for two interleaved processes: a login flow and an online order flow.</a:t>
+            </a:r>
+          </a:p>
+          <a:p>
+            <a:pPr lvl="1"/>
+            <a:r>
+              <a:rPr sz="2000" b="0">
+                <a:solidFill>
+                  <a:srgbClr val="222222"/>
+                </a:solidFill>
+                <a:latin typeface="Calibri"/>
+              </a:rPr>
+              <a:t>Groups first separate the two processes, then physically line up holding the cards in a defensible order.</a:t>
+            </a:r>
+          </a:p>
+          <a:p>
+            <a:pPr lvl="1"/>
+            <a:r>
+              <a:rPr sz="2000" b="0">
+                <a:solidFill>
+                  <a:srgbClr val="222222"/>
+                </a:solidFill>
+                <a:latin typeface="Calibri"/>
+              </a:rPr>
+              <a:t>Teacher swaps two students, for example take payment before check stock; the group must state the concrete failure caused, or accept the swap if genuinely order-independent.</a:t>
+            </a:r>
+          </a:p>
+          <a:p>
+            <a:pPr lvl="1"/>
+            <a:r>
+              <a:rPr sz="2000" b="0">
+                <a:solidFill>
+                  <a:srgbClr val="222222"/>
+                </a:solidFill>
+                <a:latin typeface="Calibri"/>
+              </a:rPr>
+              <a:t>Groups label each adjacent pair as must-follow, citing the data dependency, or could-swap.</a:t>
+            </a:r>
+          </a:p>
+          <a:p>
+            <a:pPr/>
+            <a:r>
+              <a:rPr sz="1800" b="0">
+                <a:solidFill>
+                  <a:srgbClr val="B76E00"/>
+                </a:solidFill>
+                <a:latin typeface="Calibri"/>
+              </a:rPr>
+              <a:t>Stretch: Ask where a precondition belongs in each line, such as stock at least the quantity ordered, and have that student stand side-on as a gate before the step they guard.</a:t>
+            </a:r>
+          </a:p>
+        </p:txBody>
+      </p:sp>
+    </p:spTree>
+  </p:cSld>
+  <p:clrMapOvr>
+    <a:masterClrMapping/>
+  </p:clrMapOvr>
+</p:sld>
+</file>
+
+<file path=ppt/slides/slide21.xml><?xml version="1.0" encoding="utf-8"?>
+<p:sld xmlns:a="http://schemas.openxmlformats.org/drawingml/2006/main" xmlns:p="http://schemas.openxmlformats.org/presentationml/2006/main" xmlns:r="http://schemas.openxmlformats.org/officeDocument/2006/relationships">
+  <p:cSld>
+    <p:bg>
+      <p:bgPr>
+        <a:solidFill>
+          <a:srgbClr val="FFFFFF"/>
+        </a:solidFill>
+        <a:effectLst/>
+      </p:bgPr>
+    </p:bg>
+    <p:spTree>
+      <p:nvGrpSpPr>
+        <p:cNvPr id="1" name=""/>
+        <p:cNvGrpSpPr/>
+        <p:nvPr/>
+      </p:nvGrpSpPr>
+      <p:grpSpPr/>
+      <p:sp>
+        <p:nvSpPr>
+          <p:cNvPr id="2" name="TextBox 1"/>
+          <p:cNvSpPr txBox="1"/>
+          <p:nvPr/>
+        </p:nvSpPr>
+        <p:spPr>
+          <a:xfrm>
+            <a:off x="548640" y="274320"/>
+            <a:ext cx="11064240" cy="822960"/>
+          </a:xfrm>
+          <a:prstGeom prst="rect">
+            <a:avLst/>
+          </a:prstGeom>
+          <a:noFill/>
+        </p:spPr>
+        <p:txBody>
+          <a:bodyPr wrap="square">
+            <a:spAutoFit/>
+          </a:bodyPr>
+          <a:lstStyle/>
+          <a:p>
+            <a:r>
+              <a:rPr sz="3000" b="1" i="0">
+                <a:solidFill>
+                  <a:srgbClr val="2B6CB0"/>
+                </a:solidFill>
+                <a:latin typeface="Calibri"/>
+              </a:rPr>
+              <a:t>Activity 3</a:t>
+            </a:r>
+          </a:p>
+        </p:txBody>
+      </p:sp>
+      <p:sp>
+        <p:nvSpPr>
+          <p:cNvPr id="3" name="TextBox 2"/>
+          <p:cNvSpPr txBox="1"/>
+          <p:nvPr/>
+        </p:nvSpPr>
+        <p:spPr>
+          <a:xfrm>
+            <a:off x="640080" y="1280160"/>
+            <a:ext cx="10881360" cy="5120640"/>
+          </a:xfrm>
+          <a:prstGeom prst="rect">
+            <a:avLst/>
+          </a:prstGeom>
+          <a:noFill/>
+        </p:spPr>
+        <p:txBody>
+          <a:bodyPr wrap="square">
+            <a:spAutoFit/>
+          </a:bodyPr>
+          <a:lstStyle/>
+          <a:p>
+            <a:pPr/>
+            <a:r>
+              <a:rPr sz="2200" b="1">
+                <a:solidFill>
+                  <a:srgbClr val="2B6CB0"/>
+                </a:solidFill>
+                <a:latin typeface="Calibri"/>
+              </a:rPr>
+              <a:t>Decomposition jigsaw: build the game  (25 min)</a:t>
+            </a:r>
+          </a:p>
+          <a:p>
+            <a:pPr lvl="1"/>
+            <a:r>
+              <a:rPr sz="2000" b="0">
+                <a:solidFill>
+                  <a:srgbClr val="222222"/>
+                </a:solidFill>
+                <a:latin typeface="Calibri"/>
+              </a:rPr>
+              <a:t>Give the brief for a top-down maze game: player moves, collects keys, avoids a patrolling guard, opens the exit.</a:t>
+            </a:r>
+          </a:p>
+          <a:p>
+            <a:pPr lvl="1"/>
+            <a:r>
+              <a:rPr sz="2000" b="0">
+                <a:solidFill>
+                  <a:srgbClr val="222222"/>
+                </a:solidFill>
+                <a:latin typeface="Calibri"/>
+              </a:rPr>
+              <a:t>Each home-group member takes one expert card: player input and movement, guard patrol logic, key and door interactions, score and display.</a:t>
+            </a:r>
+          </a:p>
+          <a:p>
+            <a:pPr lvl="1"/>
+            <a:r>
+              <a:rPr sz="2000" b="0">
+                <a:solidFill>
+                  <a:srgbClr val="222222"/>
+                </a:solidFill>
+                <a:latin typeface="Calibri"/>
+              </a:rPr>
+              <a:t>Expert groups decompose their subsystem into four to six ordered steps, noting the data they need from and provide to other subsystems.</a:t>
+            </a:r>
+          </a:p>
+          <a:p>
+            <a:pPr lvl="1"/>
+            <a:r>
+              <a:rPr sz="2000" b="0">
+                <a:solidFill>
+                  <a:srgbClr val="222222"/>
+                </a:solidFill>
+                <a:latin typeface="Calibri"/>
+              </a:rPr>
+              <a:t>Experts return and teach their decomposition; the group assembles a master diagram of all four subsystems and the data flows between them.</a:t>
+            </a:r>
+          </a:p>
+          <a:p>
+            <a:pPr lvl="1"/>
+            <a:r>
+              <a:rPr sz="2000" b="0">
+                <a:solidFill>
+                  <a:srgbClr val="222222"/>
+                </a:solidFill>
+                <a:latin typeface="Calibri"/>
+              </a:rPr>
+              <a:t>Groups answer the integration question: which subsystems could be built and tested independently, and which pairs must agree an interface first?</a:t>
+            </a:r>
+          </a:p>
+          <a:p>
+            <a:pPr/>
+            <a:r>
+              <a:rPr sz="1800" b="0">
+                <a:solidFill>
+                  <a:srgbClr val="B76E00"/>
+                </a:solidFill>
+                <a:latin typeface="Calibri"/>
+              </a:rPr>
+              <a:t>Stretch: Mark which subsystem steps could run concurrently each frame and which cannot: guard patrol and player input are independent, but both must finish before collision checks.</a:t>
+            </a:r>
+          </a:p>
+        </p:txBody>
+      </p:sp>
+    </p:spTree>
+  </p:cSld>
+  <p:clrMapOvr>
+    <a:masterClrMapping/>
+  </p:clrMapOvr>
+</p:sld>
+</file>
+
+<file path=ppt/slides/slide22.xml><?xml version="1.0" encoding="utf-8"?>
+<p:sld xmlns:a="http://schemas.openxmlformats.org/drawingml/2006/main" xmlns:p="http://schemas.openxmlformats.org/presentationml/2006/main" xmlns:r="http://schemas.openxmlformats.org/officeDocument/2006/relationships">
+  <p:cSld>
+    <p:bg>
+      <p:bgPr>
+        <a:solidFill>
+          <a:srgbClr val="FFFFFF"/>
+        </a:solidFill>
+        <a:effectLst/>
+      </p:bgPr>
+    </p:bg>
+    <p:spTree>
+      <p:nvGrpSpPr>
+        <p:cNvPr id="1" name=""/>
+        <p:cNvGrpSpPr/>
+        <p:nvPr/>
+      </p:nvGrpSpPr>
+      <p:grpSpPr/>
+      <p:sp>
+        <p:nvSpPr>
+          <p:cNvPr id="2" name="TextBox 1"/>
+          <p:cNvSpPr txBox="1"/>
+          <p:nvPr/>
+        </p:nvSpPr>
+        <p:spPr>
+          <a:xfrm>
+            <a:off x="548640" y="274320"/>
+            <a:ext cx="11064240" cy="822960"/>
+          </a:xfrm>
+          <a:prstGeom prst="rect">
+            <a:avLst/>
+          </a:prstGeom>
+          <a:noFill/>
+        </p:spPr>
+        <p:txBody>
+          <a:bodyPr wrap="square">
+            <a:spAutoFit/>
+          </a:bodyPr>
+          <a:lstStyle/>
+          <a:p>
+            <a:r>
+              <a:rPr sz="3000" b="1" i="0">
+                <a:solidFill>
+                  <a:srgbClr val="2B6CB0"/>
+                </a:solidFill>
+                <a:latin typeface="Calibri"/>
+              </a:rPr>
+              <a:t>Practice (1-4)</a:t>
+            </a:r>
+          </a:p>
+        </p:txBody>
+      </p:sp>
+      <p:sp>
+        <p:nvSpPr>
+          <p:cNvPr id="3" name="TextBox 2"/>
+          <p:cNvSpPr txBox="1"/>
+          <p:nvPr/>
+        </p:nvSpPr>
+        <p:spPr>
+          <a:xfrm>
+            <a:off x="640080" y="1280160"/>
+            <a:ext cx="10881360" cy="5120640"/>
+          </a:xfrm>
+          <a:prstGeom prst="rect">
+            <a:avLst/>
+          </a:prstGeom>
+          <a:noFill/>
+        </p:spPr>
+        <p:txBody>
+          <a:bodyPr wrap="square">
+            <a:spAutoFit/>
+          </a:bodyPr>
+          <a:lstStyle/>
+          <a:p>
+            <a:r>
+              <a:rPr sz="2000" b="1">
+                <a:solidFill>
+                  <a:srgbClr val="222222"/>
+                </a:solidFill>
+                <a:latin typeface="Calibri"/>
+              </a:rPr>
+              <a:t>1. Define decomposition. (1)</a:t>
+            </a:r>
+          </a:p>
+          <a:p>
+            <a:r>
+              <a:rPr sz="2000" b="1">
+                <a:solidFill>
+                  <a:srgbClr val="222222"/>
+                </a:solidFill>
+                <a:latin typeface="Calibri"/>
+              </a:rPr>
+              <a:t>2. State two components of the problem of calculating and printing a class's exam grades. (2)</a:t>
+            </a:r>
+          </a:p>
+          <a:p>
+            <a:r>
+              <a:rPr sz="2000" b="1">
+                <a:solidFill>
+                  <a:srgbClr val="222222"/>
+                </a:solidFill>
+                <a:latin typeface="Calibri"/>
+              </a:rPr>
+              <a:t>3. A vending machine program must be written. Identify four sub-procedures the solution could use. (4)</a:t>
+            </a:r>
+          </a:p>
+          <a:p>
+            <a:r>
+              <a:rPr sz="2000" b="1">
+                <a:solidFill>
+                  <a:srgbClr val="222222"/>
+                </a:solidFill>
+                <a:latin typeface="Calibri"/>
+              </a:rPr>
+              <a:t>4. Explain why the steps take payment and check stock in an online shop must run in a particular order. (2)</a:t>
+            </a:r>
+          </a:p>
+        </p:txBody>
+      </p:sp>
+    </p:spTree>
+  </p:cSld>
+  <p:clrMapOvr>
+    <a:masterClrMapping/>
+  </p:clrMapOvr>
+</p:sld>
+</file>
+
+<file path=ppt/slides/slide23.xml><?xml version="1.0" encoding="utf-8"?>
+<p:sld xmlns:a="http://schemas.openxmlformats.org/drawingml/2006/main" xmlns:p="http://schemas.openxmlformats.org/presentationml/2006/main" xmlns:r="http://schemas.openxmlformats.org/officeDocument/2006/relationships">
+  <p:cSld>
+    <p:bg>
+      <p:bgPr>
+        <a:solidFill>
+          <a:srgbClr val="FFFFFF"/>
+        </a:solidFill>
+        <a:effectLst/>
+      </p:bgPr>
+    </p:bg>
+    <p:spTree>
+      <p:nvGrpSpPr>
+        <p:cNvPr id="1" name=""/>
+        <p:cNvGrpSpPr/>
+        <p:nvPr/>
+      </p:nvGrpSpPr>
+      <p:grpSpPr/>
+      <p:sp>
+        <p:nvSpPr>
+          <p:cNvPr id="2" name="TextBox 1"/>
+          <p:cNvSpPr txBox="1"/>
+          <p:nvPr/>
+        </p:nvSpPr>
+        <p:spPr>
+          <a:xfrm>
+            <a:off x="548640" y="274320"/>
+            <a:ext cx="11064240" cy="822960"/>
+          </a:xfrm>
+          <a:prstGeom prst="rect">
+            <a:avLst/>
+          </a:prstGeom>
+          <a:noFill/>
+        </p:spPr>
+        <p:txBody>
+          <a:bodyPr wrap="square">
+            <a:spAutoFit/>
+          </a:bodyPr>
+          <a:lstStyle/>
+          <a:p>
+            <a:r>
+              <a:rPr sz="3000" b="1" i="0">
+                <a:solidFill>
+                  <a:srgbClr val="2B6CB0"/>
+                </a:solidFill>
+                <a:latin typeface="Calibri"/>
+              </a:rPr>
+              <a:t>Practice — answers (1-4)</a:t>
+            </a:r>
+          </a:p>
+        </p:txBody>
+      </p:sp>
+      <p:sp>
+        <p:nvSpPr>
+          <p:cNvPr id="3" name="TextBox 2"/>
+          <p:cNvSpPr txBox="1"/>
+          <p:nvPr/>
+        </p:nvSpPr>
+        <p:spPr>
+          <a:xfrm>
+            <a:off x="640080" y="1280160"/>
+            <a:ext cx="10881360" cy="5120640"/>
+          </a:xfrm>
+          <a:prstGeom prst="rect">
+            <a:avLst/>
+          </a:prstGeom>
+          <a:noFill/>
+        </p:spPr>
+        <p:txBody>
+          <a:bodyPr wrap="square">
+            <a:spAutoFit/>
+          </a:bodyPr>
+          <a:lstStyle/>
+          <a:p>
+            <a:r>
+              <a:rPr sz="2000" b="1">
+                <a:solidFill>
+                  <a:srgbClr val="222222"/>
+                </a:solidFill>
+                <a:latin typeface="Calibri"/>
+              </a:rPr>
+              <a:t>1. Define decomposition. (1)</a:t>
+            </a:r>
+          </a:p>
+          <a:p>
+            <a:pPr lvl="1"/>
+            <a:r>
+              <a:rPr sz="1800" i="1">
+                <a:solidFill>
+                  <a:srgbClr val="B76E00"/>
+                </a:solidFill>
+                <a:latin typeface="Calibri"/>
+              </a:rPr>
+              <a:t>Answer: Breaking a problem down into smaller sub-problems, each of which is easier to solve (1).</a:t>
+            </a:r>
+          </a:p>
+          <a:p>
+            <a:r>
+              <a:rPr sz="2000" b="1">
+                <a:solidFill>
+                  <a:srgbClr val="222222"/>
+                </a:solidFill>
+                <a:latin typeface="Calibri"/>
+              </a:rPr>
+              <a:t>2. State two components of the problem of calculating and printing a class's exam grades. (2)</a:t>
+            </a:r>
+          </a:p>
+          <a:p>
+            <a:pPr lvl="1"/>
+            <a:r>
+              <a:rPr sz="1800" i="1">
+                <a:solidFill>
+                  <a:srgbClr val="B76E00"/>
+                </a:solidFill>
+                <a:latin typeface="Calibri"/>
+              </a:rPr>
+              <a:t>Answer: Any two of: inputting or reading the marks (1); calculating each grade from the mark (1); outputting or printing the results (1).</a:t>
+            </a:r>
+          </a:p>
+          <a:p>
+            <a:r>
+              <a:rPr sz="2000" b="1">
+                <a:solidFill>
+                  <a:srgbClr val="222222"/>
+                </a:solidFill>
+                <a:latin typeface="Calibri"/>
+              </a:rPr>
+              <a:t>3. A vending machine program must be written. Identify four sub-procedures the solution could use. (4)</a:t>
+            </a:r>
+          </a:p>
+          <a:p>
+            <a:pPr lvl="1"/>
+            <a:r>
+              <a:rPr sz="1800" i="1">
+                <a:solidFill>
+                  <a:srgbClr val="B76E00"/>
+                </a:solidFill>
+                <a:latin typeface="Calibri"/>
+              </a:rPr>
+              <a:t>Answer: One mark each for four sensible named jobs, for example: readSelection (1); acceptAndCheckPayment (1); dispenseItem (1); giveChange or updateStockLevel (1).</a:t>
+            </a:r>
+          </a:p>
+          <a:p>
+            <a:r>
+              <a:rPr sz="2000" b="1">
+                <a:solidFill>
+                  <a:srgbClr val="222222"/>
+                </a:solidFill>
+                <a:latin typeface="Calibri"/>
+              </a:rPr>
+              <a:t>4. Explain why the steps take payment and check stock in an online shop must run in a particular order. (2)</a:t>
+            </a:r>
+          </a:p>
+          <a:p>
+            <a:pPr lvl="1"/>
+            <a:r>
+              <a:rPr sz="1800" i="1">
+                <a:solidFill>
+                  <a:srgbClr val="B76E00"/>
+                </a:solidFill>
+                <a:latin typeface="Calibri"/>
+              </a:rPr>
+              <a:t>Answer: Check stock must come first because payment depends on knowing the item is available (1); charging a customer for unavailable goods would then require a refund, a concrete failure (1).</a:t>
+            </a:r>
+          </a:p>
+        </p:txBody>
+      </p:sp>
+    </p:spTree>
+  </p:cSld>
+  <p:clrMapOvr>
+    <a:masterClrMapping/>
+  </p:clrMapOvr>
+</p:sld>
+</file>
+
+<file path=ppt/slides/slide24.xml><?xml version="1.0" encoding="utf-8"?>
+<p:sld xmlns:a="http://schemas.openxmlformats.org/drawingml/2006/main" xmlns:p="http://schemas.openxmlformats.org/presentationml/2006/main" xmlns:r="http://schemas.openxmlformats.org/officeDocument/2006/relationships">
+  <p:cSld>
+    <p:bg>
+      <p:bgPr>
+        <a:solidFill>
+          <a:srgbClr val="FFFFFF"/>
+        </a:solidFill>
+        <a:effectLst/>
+      </p:bgPr>
+    </p:bg>
+    <p:spTree>
+      <p:nvGrpSpPr>
+        <p:cNvPr id="1" name=""/>
+        <p:cNvGrpSpPr/>
+        <p:nvPr/>
+      </p:nvGrpSpPr>
+      <p:grpSpPr/>
+      <p:sp>
+        <p:nvSpPr>
+          <p:cNvPr id="2" name="TextBox 1"/>
+          <p:cNvSpPr txBox="1"/>
+          <p:nvPr/>
+        </p:nvSpPr>
+        <p:spPr>
+          <a:xfrm>
+            <a:off x="548640" y="274320"/>
+            <a:ext cx="11064240" cy="822960"/>
+          </a:xfrm>
+          <a:prstGeom prst="rect">
+            <a:avLst/>
+          </a:prstGeom>
+          <a:noFill/>
+        </p:spPr>
+        <p:txBody>
+          <a:bodyPr wrap="square">
+            <a:spAutoFit/>
+          </a:bodyPr>
+          <a:lstStyle/>
+          <a:p>
+            <a:r>
+              <a:rPr sz="3000" b="1" i="0">
+                <a:solidFill>
+                  <a:srgbClr val="2B6CB0"/>
+                </a:solidFill>
+                <a:latin typeface="Calibri"/>
+              </a:rPr>
+              <a:t>Practice (5-8)</a:t>
+            </a:r>
+          </a:p>
+        </p:txBody>
+      </p:sp>
+      <p:sp>
+        <p:nvSpPr>
+          <p:cNvPr id="3" name="TextBox 2"/>
+          <p:cNvSpPr txBox="1"/>
+          <p:nvPr/>
+        </p:nvSpPr>
+        <p:spPr>
+          <a:xfrm>
+            <a:off x="640080" y="1280160"/>
+            <a:ext cx="10881360" cy="5120640"/>
+          </a:xfrm>
+          <a:prstGeom prst="rect">
+            <a:avLst/>
+          </a:prstGeom>
+          <a:noFill/>
+        </p:spPr>
+        <p:txBody>
+          <a:bodyPr wrap="square">
+            <a:spAutoFit/>
+          </a:bodyPr>
+          <a:lstStyle/>
+          <a:p>
+            <a:r>
+              <a:rPr sz="2000" b="1">
+                <a:solidFill>
+                  <a:srgbClr val="222222"/>
+                </a:solidFill>
+                <a:latin typeface="Calibri"/>
+              </a:rPr>
+              <a:t>1. Describe the difference between decomposition and abstraction. (2)</a:t>
+            </a:r>
+          </a:p>
+          <a:p>
+            <a:r>
+              <a:rPr sz="2000" b="1">
+                <a:solidFill>
+                  <a:srgbClr val="222222"/>
+                </a:solidFill>
+                <a:latin typeface="Calibri"/>
+              </a:rPr>
+              <a:t>2. Explain two benefits to a development team of splitting a program into sub-procedures. (4)</a:t>
+            </a:r>
+          </a:p>
+          <a:p>
+            <a:r>
+              <a:rPr sz="2000" b="1">
+                <a:solidFill>
+                  <a:srgbClr val="222222"/>
+                </a:solidFill>
+                <a:latin typeface="Calibri"/>
+              </a:rPr>
+              <a:t>3. Explain how a parameter makes a sub-procedure reusable. (2)</a:t>
+            </a:r>
+          </a:p>
+          <a:p>
+            <a:r>
+              <a:rPr sz="2000" b="1">
+                <a:solidFill>
+                  <a:srgbClr val="222222"/>
+                </a:solidFill>
+                <a:latin typeface="Calibri"/>
+              </a:rPr>
+              <a:t>4. A program will manage a school library kiosk offering borrow, return and reserve. Identify the sub-procedures needed and state, with a reason, which must run before any of the others. (4)</a:t>
+            </a:r>
+          </a:p>
+        </p:txBody>
+      </p:sp>
+    </p:spTree>
+  </p:cSld>
+  <p:clrMapOvr>
+    <a:masterClrMapping/>
+  </p:clrMapOvr>
+</p:sld>
+</file>
+
+<file path=ppt/slides/slide25.xml><?xml version="1.0" encoding="utf-8"?>
+<p:sld xmlns:a="http://schemas.openxmlformats.org/drawingml/2006/main" xmlns:p="http://schemas.openxmlformats.org/presentationml/2006/main" xmlns:r="http://schemas.openxmlformats.org/officeDocument/2006/relationships">
+  <p:cSld>
+    <p:bg>
+      <p:bgPr>
+        <a:solidFill>
+          <a:srgbClr val="FFFFFF"/>
+        </a:solidFill>
+        <a:effectLst/>
+      </p:bgPr>
+    </p:bg>
+    <p:spTree>
+      <p:nvGrpSpPr>
+        <p:cNvPr id="1" name=""/>
+        <p:cNvGrpSpPr/>
+        <p:nvPr/>
+      </p:nvGrpSpPr>
+      <p:grpSpPr/>
+      <p:sp>
+        <p:nvSpPr>
+          <p:cNvPr id="2" name="TextBox 1"/>
+          <p:cNvSpPr txBox="1"/>
+          <p:nvPr/>
+        </p:nvSpPr>
+        <p:spPr>
+          <a:xfrm>
+            <a:off x="548640" y="274320"/>
+            <a:ext cx="11064240" cy="822960"/>
+          </a:xfrm>
+          <a:prstGeom prst="rect">
+            <a:avLst/>
+          </a:prstGeom>
+          <a:noFill/>
+        </p:spPr>
+        <p:txBody>
+          <a:bodyPr wrap="square">
+            <a:spAutoFit/>
+          </a:bodyPr>
+          <a:lstStyle/>
+          <a:p>
+            <a:r>
+              <a:rPr sz="3000" b="1" i="0">
+                <a:solidFill>
+                  <a:srgbClr val="2B6CB0"/>
+                </a:solidFill>
+                <a:latin typeface="Calibri"/>
+              </a:rPr>
+              <a:t>Practice — answers (5-8)</a:t>
+            </a:r>
+          </a:p>
+        </p:txBody>
+      </p:sp>
+      <p:sp>
+        <p:nvSpPr>
+          <p:cNvPr id="3" name="TextBox 2"/>
+          <p:cNvSpPr txBox="1"/>
+          <p:nvPr/>
+        </p:nvSpPr>
+        <p:spPr>
+          <a:xfrm>
+            <a:off x="640080" y="1280160"/>
+            <a:ext cx="10881360" cy="5120640"/>
+          </a:xfrm>
+          <a:prstGeom prst="rect">
+            <a:avLst/>
+          </a:prstGeom>
+          <a:noFill/>
+        </p:spPr>
+        <p:txBody>
+          <a:bodyPr wrap="square">
+            <a:spAutoFit/>
+          </a:bodyPr>
+          <a:lstStyle/>
+          <a:p>
+            <a:r>
+              <a:rPr sz="2000" b="1">
+                <a:solidFill>
+                  <a:srgbClr val="222222"/>
+                </a:solidFill>
+                <a:latin typeface="Calibri"/>
+              </a:rPr>
+              <a:t>1. Describe the difference between decomposition and abstraction. (2)</a:t>
+            </a:r>
+          </a:p>
+          <a:p>
+            <a:pPr lvl="1"/>
+            <a:r>
+              <a:rPr sz="1800" i="1">
+                <a:solidFill>
+                  <a:srgbClr val="B76E00"/>
+                </a:solidFill>
+                <a:latin typeface="Calibri"/>
+              </a:rPr>
+              <a:t>Answer: Decomposition breaks a problem into smaller sub-problems to be solved separately (1); abstraction removes or hides unnecessary detail so only what is relevant remains (1).</a:t>
+            </a:r>
+          </a:p>
+          <a:p>
+            <a:r>
+              <a:rPr sz="2000" b="1">
+                <a:solidFill>
+                  <a:srgbClr val="222222"/>
+                </a:solidFill>
+                <a:latin typeface="Calibri"/>
+              </a:rPr>
+              <a:t>2. Explain two benefits to a development team of splitting a program into sub-procedures. (4)</a:t>
+            </a:r>
+          </a:p>
+          <a:p>
+            <a:pPr lvl="1"/>
+            <a:r>
+              <a:rPr sz="1800" i="1">
+                <a:solidFill>
+                  <a:srgbClr val="B76E00"/>
+                </a:solidFill>
+                <a:latin typeface="Calibri"/>
+              </a:rPr>
+              <a:t>Answer: Sub-procedures can be shared out so developers work in parallel, cutting development time (2); each can be tested or maintained in isolation so errors are located quickly and fixes do not ripple through the program (2).</a:t>
+            </a:r>
+          </a:p>
+          <a:p>
+            <a:r>
+              <a:rPr sz="2000" b="1">
+                <a:solidFill>
+                  <a:srgbClr val="222222"/>
+                </a:solidFill>
+                <a:latin typeface="Calibri"/>
+              </a:rPr>
+              <a:t>3. Explain how a parameter makes a sub-procedure reusable. (2)</a:t>
+            </a:r>
+          </a:p>
+          <a:p>
+            <a:pPr lvl="1"/>
+            <a:r>
+              <a:rPr sz="1800" i="1">
+                <a:solidFill>
+                  <a:srgbClr val="B76E00"/>
+                </a:solidFill>
+                <a:latin typeface="Calibri"/>
+              </a:rPr>
+              <a:t>Answer: A parameter passes a value in when the sub-procedure is called (1), so the same code handles many different cases instead of duplicating near-identical routines (1).</a:t>
+            </a:r>
+          </a:p>
+          <a:p>
+            <a:r>
+              <a:rPr sz="2000" b="1">
+                <a:solidFill>
+                  <a:srgbClr val="222222"/>
+                </a:solidFill>
+                <a:latin typeface="Calibri"/>
+              </a:rPr>
+              <a:t>4. A program will manage a school library kiosk offering borrow, return and reserve. Identify the sub-procedures needed and state, with a reason, which must run before any of the others. (4)</a:t>
+            </a:r>
+          </a:p>
+          <a:p>
+            <a:pPr lvl="1"/>
+            <a:r>
+              <a:rPr sz="1800" i="1">
+                <a:solidFill>
+                  <a:srgbClr val="B76E00"/>
+                </a:solidFill>
+                <a:latin typeface="Calibri"/>
+              </a:rPr>
+              <a:t>Answer: Sub-procedures: authenticate the member, borrow, return, reserve, update the loans database (2, any four sensible); authenticate must run first (1) because every other action depends on knowing which valid member is acting (1).</a:t>
+            </a:r>
+          </a:p>
+        </p:txBody>
+      </p:sp>
+    </p:spTree>
+  </p:cSld>
+  <p:clrMapOvr>
+    <a:masterClrMapping/>
+  </p:clrMapOvr>
+</p:sld>
+</file>
+
+<file path=ppt/slides/slide26.xml><?xml version="1.0" encoding="utf-8"?>
+<p:sld xmlns:a="http://schemas.openxmlformats.org/drawingml/2006/main" xmlns:p="http://schemas.openxmlformats.org/presentationml/2006/main" xmlns:r="http://schemas.openxmlformats.org/officeDocument/2006/relationships">
+  <p:cSld>
+    <p:bg>
+      <p:bgPr>
+        <a:solidFill>
+          <a:srgbClr val="FFFFFF"/>
+        </a:solidFill>
+        <a:effectLst/>
+      </p:bgPr>
+    </p:bg>
+    <p:spTree>
+      <p:nvGrpSpPr>
+        <p:cNvPr id="1" name=""/>
+        <p:cNvGrpSpPr/>
+        <p:nvPr/>
+      </p:nvGrpSpPr>
+      <p:grpSpPr/>
+      <p:sp>
+        <p:nvSpPr>
+          <p:cNvPr id="2" name="TextBox 1"/>
+          <p:cNvSpPr txBox="1"/>
+          <p:nvPr/>
+        </p:nvSpPr>
+        <p:spPr>
+          <a:xfrm>
+            <a:off x="548640" y="274320"/>
+            <a:ext cx="11064240" cy="822960"/>
+          </a:xfrm>
+          <a:prstGeom prst="rect">
+            <a:avLst/>
+          </a:prstGeom>
+          <a:noFill/>
+        </p:spPr>
+        <p:txBody>
+          <a:bodyPr wrap="square">
+            <a:spAutoFit/>
+          </a:bodyPr>
+          <a:lstStyle/>
+          <a:p>
+            <a:r>
+              <a:rPr sz="3000" b="1" i="0">
+                <a:solidFill>
+                  <a:srgbClr val="2B6CB0"/>
+                </a:solidFill>
+                <a:latin typeface="Calibri"/>
+              </a:rPr>
+              <a:t>Common misconceptions</a:t>
+            </a:r>
+          </a:p>
+        </p:txBody>
+      </p:sp>
+      <p:sp>
+        <p:nvSpPr>
+          <p:cNvPr id="3" name="TextBox 2"/>
+          <p:cNvSpPr txBox="1"/>
+          <p:nvPr/>
+        </p:nvSpPr>
+        <p:spPr>
+          <a:xfrm>
+            <a:off x="640080" y="1280160"/>
+            <a:ext cx="10881360" cy="5120640"/>
+          </a:xfrm>
+          <a:prstGeom prst="rect">
+            <a:avLst/>
+          </a:prstGeom>
+          <a:noFill/>
+        </p:spPr>
+        <p:txBody>
+          <a:bodyPr wrap="square">
+            <a:spAutoFit/>
+          </a:bodyPr>
+          <a:lstStyle/>
+          <a:p>
+            <a:pPr/>
+            <a:r>
+              <a:rPr sz="2000" b="0">
+                <a:solidFill>
+                  <a:srgbClr val="222222"/>
+                </a:solidFill>
+                <a:latin typeface="Calibri"/>
+              </a:rPr>
+              <a:t>✗ Students often think decomposition and abstraction are the same skill, but decomposition splits a problem into parts while abstraction removes detail.</a:t>
+            </a:r>
+          </a:p>
+          <a:p>
+            <a:pPr/>
+            <a:r>
+              <a:rPr sz="2000" b="0">
+                <a:solidFill>
+                  <a:srgbClr val="222222"/>
+                </a:solidFill>
+                <a:latin typeface="Calibri"/>
+              </a:rPr>
+              <a:t>✗ Students often think any order of steps will do, but steps that consume earlier outputs have a fixed, justifiable position.</a:t>
+            </a:r>
+          </a:p>
+          <a:p>
+            <a:pPr/>
+            <a:r>
+              <a:rPr sz="2000" b="0">
+                <a:solidFill>
+                  <a:srgbClr val="222222"/>
+                </a:solidFill>
+                <a:latin typeface="Calibri"/>
+              </a:rPr>
+              <a:t>✗ Students often define decomposition when asked to apply it, but scenario questions want the scenario's actual named sub-procedures in order.</a:t>
+            </a:r>
+          </a:p>
+          <a:p>
+            <a:pPr/>
+            <a:r>
+              <a:rPr sz="2000" b="0">
+                <a:solidFill>
+                  <a:srgbClr val="222222"/>
+                </a:solidFill>
+                <a:latin typeface="Calibri"/>
+              </a:rPr>
+              <a:t>✗ Students often think more sub-procedures always means better design, but each should be one clear job; fragmenting a single job adds complexity.</a:t>
+            </a:r>
+          </a:p>
+          <a:p>
+            <a:pPr/>
+            <a:r>
+              <a:rPr sz="2000" b="0">
+                <a:solidFill>
+                  <a:srgbClr val="222222"/>
+                </a:solidFill>
+                <a:latin typeface="Calibri"/>
+              </a:rPr>
+              <a:t>✗ Students often think sub-procedures are only about neatness, but the marked benefits are parallel teamwork, isolated testing, easier maintenance and reuse.</a:t>
+            </a:r>
+          </a:p>
+        </p:txBody>
+      </p:sp>
+    </p:spTree>
+  </p:cSld>
+  <p:clrMapOvr>
+    <a:masterClrMapping/>
+  </p:clrMapOvr>
+</p:sld>
+</file>
+
+<file path=ppt/slides/slide27.xml><?xml version="1.0" encoding="utf-8"?>
+<p:sld xmlns:a="http://schemas.openxmlformats.org/drawingml/2006/main" xmlns:p="http://schemas.openxmlformats.org/presentationml/2006/main" xmlns:r="http://schemas.openxmlformats.org/officeDocument/2006/relationships">
+  <p:cSld>
+    <p:bg>
+      <p:bgPr>
+        <a:solidFill>
+          <a:srgbClr val="FFFFFF"/>
+        </a:solidFill>
+        <a:effectLst/>
+      </p:bgPr>
+    </p:bg>
+    <p:spTree>
+      <p:nvGrpSpPr>
+        <p:cNvPr id="1" name=""/>
+        <p:cNvGrpSpPr/>
+        <p:nvPr/>
+      </p:nvGrpSpPr>
+      <p:grpSpPr/>
+      <p:sp>
+        <p:nvSpPr>
+          <p:cNvPr id="2" name="TextBox 1"/>
+          <p:cNvSpPr txBox="1"/>
+          <p:nvPr/>
+        </p:nvSpPr>
+        <p:spPr>
+          <a:xfrm>
+            <a:off x="548640" y="274320"/>
+            <a:ext cx="11064240" cy="822960"/>
+          </a:xfrm>
+          <a:prstGeom prst="rect">
+            <a:avLst/>
+          </a:prstGeom>
+          <a:noFill/>
+        </p:spPr>
+        <p:txBody>
+          <a:bodyPr wrap="square">
+            <a:spAutoFit/>
+          </a:bodyPr>
+          <a:lstStyle/>
+          <a:p>
+            <a:r>
+              <a:rPr sz="3000" b="1" i="0">
+                <a:solidFill>
+                  <a:srgbClr val="2B6CB0"/>
+                </a:solidFill>
+                <a:latin typeface="Calibri"/>
+              </a:rPr>
+              <a:t>How the exam asks this</a:t>
+            </a:r>
+          </a:p>
+        </p:txBody>
+      </p:sp>
+      <p:sp>
+        <p:nvSpPr>
+          <p:cNvPr id="3" name="TextBox 2"/>
+          <p:cNvSpPr txBox="1"/>
+          <p:nvPr/>
+        </p:nvSpPr>
+        <p:spPr>
+          <a:xfrm>
+            <a:off x="640080" y="1280160"/>
+            <a:ext cx="10881360" cy="5120640"/>
+          </a:xfrm>
+          <a:prstGeom prst="rect">
+            <a:avLst/>
+          </a:prstGeom>
+          <a:noFill/>
+        </p:spPr>
+        <p:txBody>
+          <a:bodyPr wrap="square">
+            <a:spAutoFit/>
+          </a:bodyPr>
+          <a:lstStyle/>
+          <a:p>
+            <a:pPr/>
+            <a:r>
+              <a:rPr sz="2000" b="0">
+                <a:solidFill>
+                  <a:srgbClr val="222222"/>
+                </a:solidFill>
+                <a:latin typeface="Calibri"/>
+              </a:rPr>
+              <a:t>Command words: identify and state for naming components, 1 to 4 marks; explain and justify for ordering and benefits, 2 to 4 marks.</a:t>
+            </a:r>
+          </a:p>
+          <a:p>
+            <a:pPr/>
+            <a:r>
+              <a:rPr sz="2000" b="0">
+                <a:solidFill>
+                  <a:srgbClr val="222222"/>
+                </a:solidFill>
+                <a:latin typeface="Calibri"/>
+              </a:rPr>
+              <a:t>Application beats definition: questions give an unseen scenario and expect its actual sub-procedures, not textbook definitions.</a:t>
+            </a:r>
+          </a:p>
+          <a:p>
+            <a:pPr/>
+            <a:r>
+              <a:rPr sz="2000" b="0">
+                <a:solidFill>
+                  <a:srgbClr val="222222"/>
+                </a:solidFill>
+                <a:latin typeface="Calibri"/>
+              </a:rPr>
+              <a:t>Ordering marks come from naming the dependency: state which earlier output each step needs.</a:t>
+            </a:r>
+          </a:p>
+          <a:p>
+            <a:pPr/>
+            <a:r>
+              <a:rPr sz="2000" b="0">
+                <a:solidFill>
+                  <a:srgbClr val="222222"/>
+                </a:solidFill>
+                <a:latin typeface="Calibri"/>
+              </a:rPr>
+              <a:t>Example stem: A company is developing a self-service checkout. Identify the sub-procedures the program will need and justify the order in which two of them must execute. (6)</a:t>
+            </a:r>
+          </a:p>
+        </p:txBody>
+      </p:sp>
+    </p:spTree>
+  </p:cSld>
+  <p:clrMapOvr>
+    <a:masterClrMapping/>
+  </p:clrMapOvr>
+</p:sld>
+</file>
+
+<file path=ppt/slides/slide28.xml><?xml version="1.0" encoding="utf-8"?>
+<p:sld xmlns:a="http://schemas.openxmlformats.org/drawingml/2006/main" xmlns:p="http://schemas.openxmlformats.org/presentationml/2006/main" xmlns:r="http://schemas.openxmlformats.org/officeDocument/2006/relationships">
+  <p:cSld>
+    <p:bg>
+      <p:bgPr>
+        <a:solidFill>
+          <a:srgbClr val="FFFFFF"/>
+        </a:solidFill>
+        <a:effectLst/>
+      </p:bgPr>
+    </p:bg>
+    <p:spTree>
+      <p:nvGrpSpPr>
+        <p:cNvPr id="1" name=""/>
+        <p:cNvGrpSpPr/>
+        <p:nvPr/>
+      </p:nvGrpSpPr>
+      <p:grpSpPr/>
+      <p:sp>
+        <p:nvSpPr>
+          <p:cNvPr id="2" name="TextBox 1"/>
+          <p:cNvSpPr txBox="1"/>
+          <p:nvPr/>
+        </p:nvSpPr>
+        <p:spPr>
+          <a:xfrm>
+            <a:off x="548640" y="274320"/>
+            <a:ext cx="11064240" cy="822960"/>
+          </a:xfrm>
+          <a:prstGeom prst="rect">
+            <a:avLst/>
+          </a:prstGeom>
+          <a:noFill/>
+        </p:spPr>
+        <p:txBody>
+          <a:bodyPr wrap="square">
+            <a:spAutoFit/>
+          </a:bodyPr>
+          <a:lstStyle/>
+          <a:p>
+            <a:r>
+              <a:rPr sz="3000" b="1" i="0">
+                <a:solidFill>
+                  <a:srgbClr val="2B6CB0"/>
+                </a:solidFill>
+                <a:latin typeface="Calibri"/>
+              </a:rPr>
+              <a:t>Your turn</a:t>
+            </a:r>
+          </a:p>
+        </p:txBody>
+      </p:sp>
+      <p:sp>
+        <p:nvSpPr>
+          <p:cNvPr id="3" name="TextBox 2"/>
+          <p:cNvSpPr txBox="1"/>
+          <p:nvPr/>
+        </p:nvSpPr>
+        <p:spPr>
+          <a:xfrm>
+            <a:off x="640080" y="1280160"/>
+            <a:ext cx="10881360" cy="5120640"/>
+          </a:xfrm>
+          <a:prstGeom prst="rect">
+            <a:avLst/>
+          </a:prstGeom>
+          <a:noFill/>
+        </p:spPr>
+        <p:txBody>
+          <a:bodyPr wrap="square">
+            <a:spAutoFit/>
+          </a:bodyPr>
+          <a:lstStyle/>
+          <a:p>
+            <a:pPr/>
+            <a:r>
+              <a:rPr sz="2400" b="1">
+                <a:solidFill>
+                  <a:srgbClr val="2B6CB0"/>
+                </a:solidFill>
+                <a:latin typeface="Calibri"/>
+              </a:rPr>
+              <a:t>Task</a:t>
+            </a:r>
+          </a:p>
+          <a:p>
+            <a:pPr lvl="1"/>
+            <a:r>
+              <a:rPr sz="2200" b="0">
+                <a:solidFill>
+                  <a:srgbClr val="222222"/>
+                </a:solidFill>
+                <a:latin typeface="Calibri"/>
+              </a:rPr>
+              <a:t>Decompose a school attendance app into five to seven named sub-procedures; draw them as a diagram with arrows showing data dependencies, and mark each adjacent pair must-follow or could-swap.</a:t>
+            </a:r>
+          </a:p>
+          <a:p>
+            <a:r>
+              <a:rPr sz="2400" b="1">
+                <a:solidFill>
+                  <a:srgbClr val="B76E00"/>
+                </a:solidFill>
+                <a:latin typeface="Calibri"/>
+              </a:rPr>
+              <a:t>Challenge / stretch</a:t>
+            </a:r>
+          </a:p>
+          <a:p>
+            <a:pPr lvl="1"/>
+            <a:r>
+              <a:rPr sz="2200" b="0">
+                <a:solidFill>
+                  <a:srgbClr val="222222"/>
+                </a:solidFill>
+                <a:latin typeface="Calibri"/>
+              </a:rPr>
+              <a:t>For your attendance app, write OCR-style pseudocode headers for each sub-procedure with parameters, then identify one sub-procedure reusable in a different school system and one pair of sub-procedures that could run concurrently, justifying both.</a:t>
+            </a:r>
+          </a:p>
+        </p:txBody>
+      </p:sp>
+    </p:spTree>
+  </p:cSld>
+  <p:clrMapOvr>
+    <a:masterClrMapping/>
+  </p:clrMapOvr>
+</p:sld>
+</file>
+
+<file path=ppt/slides/slide29.xml><?xml version="1.0" encoding="utf-8"?>
+<p:sld xmlns:a="http://schemas.openxmlformats.org/drawingml/2006/main" xmlns:p="http://schemas.openxmlformats.org/presentationml/2006/main" xmlns:r="http://schemas.openxmlformats.org/officeDocument/2006/relationships">
+  <p:cSld>
+    <p:bg>
+      <p:bgPr>
+        <a:solidFill>
+          <a:srgbClr val="FFFFFF"/>
+        </a:solidFill>
+        <a:effectLst/>
+      </p:bgPr>
+    </p:bg>
+    <p:spTree>
+      <p:nvGrpSpPr>
+        <p:cNvPr id="1" name=""/>
+        <p:cNvGrpSpPr/>
+        <p:nvPr/>
+      </p:nvGrpSpPr>
+      <p:grpSpPr/>
+      <p:sp>
+        <p:nvSpPr>
+          <p:cNvPr id="2" name="TextBox 1"/>
+          <p:cNvSpPr txBox="1"/>
+          <p:nvPr/>
+        </p:nvSpPr>
+        <p:spPr>
+          <a:xfrm>
+            <a:off x="548640" y="274320"/>
+            <a:ext cx="11064240" cy="822960"/>
+          </a:xfrm>
+          <a:prstGeom prst="rect">
+            <a:avLst/>
+          </a:prstGeom>
+          <a:noFill/>
+        </p:spPr>
+        <p:txBody>
+          <a:bodyPr wrap="square">
+            <a:spAutoFit/>
+          </a:bodyPr>
+          <a:lstStyle/>
+          <a:p>
+            <a:r>
+              <a:rPr sz="3000" b="1" i="0">
+                <a:solidFill>
+                  <a:srgbClr val="2B6CB0"/>
+                </a:solidFill>
+                <a:latin typeface="Calibri"/>
+              </a:rPr>
+              <a:t>Exit ticket</a:t>
+            </a:r>
+          </a:p>
+        </p:txBody>
+      </p:sp>
+      <p:sp>
+        <p:nvSpPr>
+          <p:cNvPr id="3" name="TextBox 2"/>
+          <p:cNvSpPr txBox="1"/>
+          <p:nvPr/>
+        </p:nvSpPr>
+        <p:spPr>
+          <a:xfrm>
+            <a:off x="640080" y="1280160"/>
+            <a:ext cx="10881360" cy="5120640"/>
+          </a:xfrm>
+          <a:prstGeom prst="rect">
+            <a:avLst/>
+          </a:prstGeom>
+          <a:noFill/>
+        </p:spPr>
+        <p:txBody>
+          <a:bodyPr wrap="square">
+            <a:spAutoFit/>
+          </a:bodyPr>
+          <a:lstStyle/>
+          <a:p>
+            <a:r>
+              <a:rPr sz="2200" b="1">
+                <a:solidFill>
+                  <a:srgbClr val="222222"/>
+                </a:solidFill>
+                <a:latin typeface="Calibri"/>
+              </a:rPr>
+              <a:t>1. What is thinking procedurally?</a:t>
+            </a:r>
+          </a:p>
+          <a:p>
+            <a:r>
+              <a:rPr sz="2200" b="1">
+                <a:solidFill>
+                  <a:srgbClr val="222222"/>
+                </a:solidFill>
+                <a:latin typeface="Calibri"/>
+              </a:rPr>
+              <a:t>2. What fixes the order of two steps in a solution?</a:t>
+            </a:r>
+          </a:p>
+          <a:p>
+            <a:r>
+              <a:rPr sz="2200" b="1">
+                <a:solidFill>
+                  <a:srgbClr val="222222"/>
+                </a:solidFill>
+                <a:latin typeface="Calibri"/>
+              </a:rPr>
+              <a:t>3. Give two benefits of solving a problem with sub-procedures.</a:t>
             </a:r>
           </a:p>
         </p:txBody>
@@ -4092,7 +6516,7 @@
                 </a:solidFill>
                 <a:latin typeface="Calibri"/>
               </a:rPr>
-              <a:t>1. What is decomposition?</a:t>
+              <a:t>1. Define abstraction.</a:t>
             </a:r>
           </a:p>
           <a:p>
@@ -4103,7 +6527,7 @@
                 </a:solidFill>
                 <a:latin typeface="Calibri"/>
               </a:rPr>
-              <a:t>2. What is a sub-procedure?</a:t>
+              <a:t>2. What is the difference between representational abstraction and generalisation?</a:t>
             </a:r>
           </a:p>
           <a:p>
@@ -4114,7 +6538,7 @@
                 </a:solidFill>
                 <a:latin typeface="Calibri"/>
               </a:rPr>
-              <a:t>3. Why must some steps run in a fixed order?</a:t>
+              <a:t>3. State two things a developer should determine before coding, as part of thinking ahead.</a:t>
             </a:r>
           </a:p>
           <a:p>
@@ -4125,7 +6549,7 @@
                 </a:solidFill>
                 <a:latin typeface="Calibri"/>
               </a:rPr>
-              <a:t>4. Give two advantages of dividing a program into sub-procedures.</a:t>
+              <a:t>4. What is caching and what is its main risk?</a:t>
             </a:r>
           </a:p>
           <a:p>
@@ -4136,7 +6560,159 @@
                 </a:solidFill>
                 <a:latin typeface="Calibri"/>
               </a:rPr>
-              <a:t>5. Interleaving (2.1.1): how does decomposition differ from abstraction?</a:t>
+              <a:t>5. What does a linker do after compilation?</a:t>
+            </a:r>
+          </a:p>
+        </p:txBody>
+      </p:sp>
+    </p:spTree>
+  </p:cSld>
+  <p:clrMapOvr>
+    <a:masterClrMapping/>
+  </p:clrMapOvr>
+</p:sld>
+</file>
+
+<file path=ppt/slides/slide30.xml><?xml version="1.0" encoding="utf-8"?>
+<p:sld xmlns:a="http://schemas.openxmlformats.org/drawingml/2006/main" xmlns:p="http://schemas.openxmlformats.org/presentationml/2006/main" xmlns:r="http://schemas.openxmlformats.org/officeDocument/2006/relationships">
+  <p:cSld>
+    <p:bg>
+      <p:bgPr>
+        <a:solidFill>
+          <a:srgbClr val="FFFFFF"/>
+        </a:solidFill>
+        <a:effectLst/>
+      </p:bgPr>
+    </p:bg>
+    <p:spTree>
+      <p:nvGrpSpPr>
+        <p:cNvPr id="1" name=""/>
+        <p:cNvGrpSpPr/>
+        <p:nvPr/>
+      </p:nvGrpSpPr>
+      <p:grpSpPr/>
+      <p:sp>
+        <p:nvSpPr>
+          <p:cNvPr id="2" name="TextBox 1"/>
+          <p:cNvSpPr txBox="1"/>
+          <p:nvPr/>
+        </p:nvSpPr>
+        <p:spPr>
+          <a:xfrm>
+            <a:off x="548640" y="274320"/>
+            <a:ext cx="11064240" cy="822960"/>
+          </a:xfrm>
+          <a:prstGeom prst="rect">
+            <a:avLst/>
+          </a:prstGeom>
+          <a:noFill/>
+        </p:spPr>
+        <p:txBody>
+          <a:bodyPr wrap="square">
+            <a:spAutoFit/>
+          </a:bodyPr>
+          <a:lstStyle/>
+          <a:p>
+            <a:r>
+              <a:rPr sz="3000" b="1" i="0">
+                <a:solidFill>
+                  <a:srgbClr val="2B6CB0"/>
+                </a:solidFill>
+                <a:latin typeface="Calibri"/>
+              </a:rPr>
+              <a:t>Exit ticket — answers</a:t>
+            </a:r>
+          </a:p>
+        </p:txBody>
+      </p:sp>
+      <p:sp>
+        <p:nvSpPr>
+          <p:cNvPr id="3" name="TextBox 2"/>
+          <p:cNvSpPr txBox="1"/>
+          <p:nvPr/>
+        </p:nvSpPr>
+        <p:spPr>
+          <a:xfrm>
+            <a:off x="640080" y="1280160"/>
+            <a:ext cx="10881360" cy="5120640"/>
+          </a:xfrm>
+          <a:prstGeom prst="rect">
+            <a:avLst/>
+          </a:prstGeom>
+          <a:noFill/>
+        </p:spPr>
+        <p:txBody>
+          <a:bodyPr wrap="square">
+            <a:spAutoFit/>
+          </a:bodyPr>
+          <a:lstStyle/>
+          <a:p>
+            <a:r>
+              <a:rPr sz="2200" b="1">
+                <a:solidFill>
+                  <a:srgbClr val="222222"/>
+                </a:solidFill>
+                <a:latin typeface="Calibri"/>
+              </a:rPr>
+              <a:t>1. What is thinking procedurally?</a:t>
+            </a:r>
+          </a:p>
+          <a:p>
+            <a:pPr lvl="1"/>
+            <a:r>
+              <a:rPr sz="1800" i="1">
+                <a:solidFill>
+                  <a:srgbClr val="B76E00"/>
+                </a:solidFill>
+                <a:latin typeface="Calibri"/>
+              </a:rPr>
+              <a:t>Answer: Breaking a problem into an ordered sequence of steps and sub-procedures, then arranging them in the correct order.</a:t>
+            </a:r>
+          </a:p>
+          <a:p>
+            <a:r>
+              <a:rPr sz="2200" b="1">
+                <a:solidFill>
+                  <a:srgbClr val="222222"/>
+                </a:solidFill>
+                <a:latin typeface="Calibri"/>
+              </a:rPr>
+              <a:t>2. What fixes the order of two steps in a solution?</a:t>
+            </a:r>
+          </a:p>
+          <a:p>
+            <a:pPr lvl="1"/>
+            <a:r>
+              <a:rPr sz="1800" i="1">
+                <a:solidFill>
+                  <a:srgbClr val="B76E00"/>
+                </a:solidFill>
+                <a:latin typeface="Calibri"/>
+              </a:rPr>
+              <a:t>Answer: A data dependency: the later step needs the output of the earlier one.</a:t>
+            </a:r>
+          </a:p>
+          <a:p>
+            <a:r>
+              <a:rPr sz="2200" b="1">
+                <a:solidFill>
+                  <a:srgbClr val="222222"/>
+                </a:solidFill>
+                <a:latin typeface="Calibri"/>
+              </a:rPr>
+              <a:t>3. Give two benefits of solving a problem with sub-procedures.</a:t>
+            </a:r>
+          </a:p>
+          <a:p>
+            <a:pPr lvl="1"/>
+            <a:r>
+              <a:rPr sz="1800" i="1">
+                <a:solidFill>
+                  <a:srgbClr val="B76E00"/>
+                </a:solidFill>
+                <a:latin typeface="Calibri"/>
+              </a:rPr>
+              <a:t>Answer: Any two of: team members build modules in parallel; modules are tested in isolation; maintenance is localised; modules can be reused.</a:t>
             </a:r>
           </a:p>
         </p:txBody>
@@ -4230,7 +6806,7 @@
                 </a:solidFill>
                 <a:latin typeface="Calibri"/>
               </a:rPr>
-              <a:t>1. What is decomposition?</a:t>
+              <a:t>1. Define abstraction.</a:t>
             </a:r>
           </a:p>
           <a:p>
@@ -4242,7 +6818,7 @@
                 </a:solidFill>
                 <a:latin typeface="Calibri"/>
               </a:rPr>
-              <a:t>Answer: Breaking one large problem into smaller sub-problems that can each be solved separately.</a:t>
+              <a:t>Answer: Removing or hiding unnecessary detail so only information relevant to the problem remains (2.1.1).</a:t>
             </a:r>
           </a:p>
           <a:p>
@@ -4253,7 +6829,7 @@
                 </a:solidFill>
                 <a:latin typeface="Calibri"/>
               </a:rPr>
-              <a:t>2. What is a sub-procedure?</a:t>
+              <a:t>2. What is the difference between representational abstraction and generalisation?</a:t>
             </a:r>
           </a:p>
           <a:p>
@@ -4265,7 +6841,7 @@
                 </a:solidFill>
                 <a:latin typeface="Calibri"/>
               </a:rPr>
-              <a:t>Answer: A self-contained, named block of code performing one task that can be called from several places.</a:t>
+              <a:t>Answer: Representational abstraction removes detail from one specific thing; generalisation groups many things by shared characteristics (2.1.1).</a:t>
             </a:r>
           </a:p>
           <a:p>
@@ -4276,7 +6852,7 @@
                 </a:solidFill>
                 <a:latin typeface="Calibri"/>
               </a:rPr>
-              <a:t>3. Why must some steps run in a fixed order?</a:t>
+              <a:t>3. State two things a developer should determine before coding, as part of thinking ahead.</a:t>
             </a:r>
           </a:p>
           <a:p>
@@ -4288,7 +6864,7 @@
                 </a:solidFill>
                 <a:latin typeface="Calibri"/>
               </a:rPr>
-              <a:t>Answer: Because a later step uses the output of an earlier step — a data dependency.</a:t>
+              <a:t>Answer: The inputs and outputs of the solution, plus any preconditions that must hold before a routine runs (2.1.2).</a:t>
             </a:r>
           </a:p>
           <a:p>
@@ -4299,7 +6875,7 @@
                 </a:solidFill>
                 <a:latin typeface="Calibri"/>
               </a:rPr>
-              <a:t>4. Give two advantages of dividing a program into sub-procedures.</a:t>
+              <a:t>4. What is caching and what is its main risk?</a:t>
             </a:r>
           </a:p>
           <a:p>
@@ -4311,7 +6887,7 @@
                 </a:solidFill>
                 <a:latin typeface="Calibri"/>
               </a:rPr>
-              <a:t>Answer: Easier to write/test/debug in isolation, reusable, shareable among a team, easier to maintain.</a:t>
+              <a:t>Answer: Storing frequently used or expensive results in faster storage for reuse; the cached copy can become stale when the source changes (2.1.2).</a:t>
             </a:r>
           </a:p>
           <a:p>
@@ -4322,7 +6898,7 @@
                 </a:solidFill>
                 <a:latin typeface="Calibri"/>
               </a:rPr>
-              <a:t>5. Interleaving (2.1.1): how does decomposition differ from abstraction?</a:t>
+              <a:t>5. What does a linker do after compilation?</a:t>
             </a:r>
           </a:p>
           <a:p>
@@ -4334,7 +6910,7 @@
                 </a:solidFill>
                 <a:latin typeface="Calibri"/>
               </a:rPr>
-              <a:t>Answer: Decomposition breaks a problem into sub-problems; abstraction removes irrelevant detail.</a:t>
+              <a:t>Answer: It combines the compiled object code with library routines and other modules, resolving references into one executable (1.2.2).</a:t>
             </a:r>
           </a:p>
         </p:txBody>
@@ -4438,7 +7014,7 @@
                 </a:solidFill>
                 <a:latin typeface="Calibri"/>
               </a:rPr>
-              <a:t> — Breaking a problem into an ordered sequence of steps and sub-procedures.</a:t>
+              <a:t> — Breaking a problem into an ordered sequence of steps and sub-procedures, then arranging them correctly.</a:t>
             </a:r>
           </a:p>
           <a:p>
@@ -4458,7 +7034,7 @@
                 </a:solidFill>
                 <a:latin typeface="Calibri"/>
               </a:rPr>
-              <a:t> — Breaking one large problem into smaller, more manageable sub-problems.</a:t>
+              <a:t> — Splitting a large problem into smaller, more manageable sub-problems.</a:t>
             </a:r>
           </a:p>
           <a:p>
@@ -4469,6 +7045,26 @@
                 </a:solidFill>
                 <a:latin typeface="Calibri"/>
               </a:rPr>
+              <a:t>Component</a:t>
+            </a:r>
+            <a:r>
+              <a:rPr sz="1800">
+                <a:solidFill>
+                  <a:srgbClr val="222222"/>
+                </a:solidFill>
+                <a:latin typeface="Calibri"/>
+              </a:rPr>
+              <a:t> — One identifiable part of a problem or solution, such as input, processing or output.</a:t>
+            </a:r>
+          </a:p>
+          <a:p>
+            <a:r>
+              <a:rPr b="1" sz="2000">
+                <a:solidFill>
+                  <a:srgbClr val="1A365D"/>
+                </a:solidFill>
+                <a:latin typeface="Calibri"/>
+              </a:rPr>
               <a:t>Sub-procedure</a:t>
             </a:r>
             <a:r>
@@ -4478,7 +7074,7 @@
                 </a:solidFill>
                 <a:latin typeface="Calibri"/>
               </a:rPr>
-              <a:t> — A self-contained, named, callable block of code that performs one task.</a:t>
+              <a:t> — A named block of code, also called a subroutine, that performs one part of the task.</a:t>
             </a:r>
           </a:p>
           <a:p>
@@ -4498,7 +7094,7 @@
                 </a:solidFill>
                 <a:latin typeface="Calibri"/>
               </a:rPr>
-              <a:t> — The order in which steps execute, fixed where dependencies exist.</a:t>
+              <a:t> — The order in which steps or procedures are carried out.</a:t>
             </a:r>
           </a:p>
           <a:p>
@@ -4509,7 +7105,7 @@
                 </a:solidFill>
                 <a:latin typeface="Calibri"/>
               </a:rPr>
-              <a:t>Data dependency</a:t>
+              <a:t>Dependency</a:t>
             </a:r>
             <a:r>
               <a:rPr sz="1800">
@@ -4518,7 +7114,7 @@
                 </a:solidFill>
                 <a:latin typeface="Calibri"/>
               </a:rPr>
-              <a:t> — When a step needs the output of an earlier step, forcing a fixed order.</a:t>
+              <a:t> — When one step needs the output of an earlier step, forcing their relative order.</a:t>
             </a:r>
           </a:p>
           <a:p>
@@ -4529,7 +7125,7 @@
                 </a:solidFill>
                 <a:latin typeface="Calibri"/>
               </a:rPr>
-              <a:t>Reuse</a:t>
+              <a:t>Modularity</a:t>
             </a:r>
             <a:r>
               <a:rPr sz="1800">
@@ -4538,7 +7134,7 @@
                 </a:solidFill>
                 <a:latin typeface="Calibri"/>
               </a:rPr>
-              <a:t> — Calling one sub-procedure from many places instead of duplicating its code.</a:t>
+              <a:t> — Building a solution from separate, self-contained parts that can be developed and tested independently.</a:t>
             </a:r>
           </a:p>
           <a:p>
@@ -4549,7 +7145,7 @@
                 </a:solidFill>
                 <a:latin typeface="Calibri"/>
               </a:rPr>
-              <a:t>Maintainability</a:t>
+              <a:t>Parameter</a:t>
             </a:r>
             <a:r>
               <a:rPr sz="1800">
@@ -4558,7 +7154,27 @@
                 </a:solidFill>
                 <a:latin typeface="Calibri"/>
               </a:rPr>
-              <a:t> — How easily code can be fixed or changed; improved by single-place sub-procedures.</a:t>
+              <a:t> — A value passed into a sub-procedure to make it general and reusable.</a:t>
+            </a:r>
+          </a:p>
+          <a:p>
+            <a:r>
+              <a:rPr b="1" sz="2000">
+                <a:solidFill>
+                  <a:srgbClr val="1A365D"/>
+                </a:solidFill>
+                <a:latin typeface="Calibri"/>
+              </a:rPr>
+              <a:t>Interface</a:t>
+            </a:r>
+            <a:r>
+              <a:rPr sz="1800">
+                <a:solidFill>
+                  <a:srgbClr val="222222"/>
+                </a:solidFill>
+                <a:latin typeface="Calibri"/>
+              </a:rPr>
+              <a:t> — The agreed inputs and outputs through which one module communicates with another.</a:t>
             </a:r>
           </a:p>
         </p:txBody>
@@ -4618,7 +7234,7 @@
                 </a:solidFill>
                 <a:latin typeface="Calibri"/>
               </a:rPr>
-              <a:t>Decomposition</a:t>
+              <a:t>What thinking procedurally means</a:t>
             </a:r>
           </a:p>
         </p:txBody>
@@ -4647,37 +7263,49 @@
           <a:p>
             <a:pPr/>
             <a:r>
-              <a:rPr sz="2200" b="0">
-                <a:solidFill>
-                  <a:srgbClr val="222222"/>
-                </a:solidFill>
-                <a:latin typeface="Calibri"/>
-              </a:rPr>
-              <a:t>Split a big problem into smaller sub-problems, e.g. a shopping site into accounts, catalogue, basket, checkout.</a:t>
+              <a:rPr sz="2000" b="0">
+                <a:solidFill>
+                  <a:srgbClr val="222222"/>
+                </a:solidFill>
+                <a:latin typeface="Calibri"/>
+              </a:rPr>
+              <a:t>Thinking procedurally breaks a problem into an ordered sequence of steps and sub-procedures.</a:t>
             </a:r>
           </a:p>
           <a:p>
             <a:pPr/>
             <a:r>
-              <a:rPr sz="2200" b="0">
-                <a:solidFill>
-                  <a:srgbClr val="222222"/>
-                </a:solidFill>
-                <a:latin typeface="Calibri"/>
-              </a:rPr>
-              <a:t>Each sub-problem can be assigned to a different developer.</a:t>
+              <a:rPr sz="2000" b="0">
+                <a:solidFill>
+                  <a:srgbClr val="222222"/>
+                </a:solidFill>
+                <a:latin typeface="Calibri"/>
+              </a:rPr>
+              <a:t>It answers two questions: what are the parts, and in what order must they run?</a:t>
             </a:r>
           </a:p>
           <a:p>
             <a:pPr/>
             <a:r>
-              <a:rPr sz="2200" b="0">
-                <a:solidFill>
-                  <a:srgbClr val="222222"/>
-                </a:solidFill>
-                <a:latin typeface="Calibri"/>
-              </a:rPr>
-              <a:t>Smaller pieces are easier to understand, test and debug.</a:t>
+              <a:rPr sz="2000" b="0">
+                <a:solidFill>
+                  <a:srgbClr val="222222"/>
+                </a:solidFill>
+                <a:latin typeface="Calibri"/>
+              </a:rPr>
+              <a:t>It is the skill behind every algorithm and every structured program.</a:t>
+            </a:r>
+          </a:p>
+          <a:p>
+            <a:pPr/>
+            <a:r>
+              <a:rPr sz="2000" b="0">
+                <a:solidFill>
+                  <a:srgbClr val="222222"/>
+                </a:solidFill>
+                <a:latin typeface="Calibri"/>
+              </a:rPr>
+              <a:t>Contrast with abstraction: abstraction removes detail; procedural thinking breaks the problem into ordered sub-steps.</a:t>
             </a:r>
           </a:p>
         </p:txBody>
@@ -4737,7 +7365,7 @@
                 </a:solidFill>
                 <a:latin typeface="Calibri"/>
               </a:rPr>
-              <a:t>Sub-procedures</a:t>
+              <a:t>Identifying the components of a problem</a:t>
             </a:r>
           </a:p>
         </p:txBody>
@@ -4766,37 +7394,49 @@
           <a:p>
             <a:pPr/>
             <a:r>
-              <a:rPr sz="2200" b="0">
-                <a:solidFill>
-                  <a:srgbClr val="222222"/>
-                </a:solidFill>
-                <a:latin typeface="Calibri"/>
-              </a:rPr>
-              <a:t>A self-contained, named block of code performing one task, e.g. calculateVAT.</a:t>
+              <a:rPr sz="2000" b="0">
+                <a:solidFill>
+                  <a:srgbClr val="222222"/>
+                </a:solidFill>
+                <a:latin typeface="Calibri"/>
+              </a:rPr>
+              <a:t>Read the problem statement and list its distinct concerns: inputs, processes, outputs, stored data.</a:t>
             </a:r>
           </a:p>
           <a:p>
             <a:pPr/>
             <a:r>
-              <a:rPr sz="2200" b="0">
-                <a:solidFill>
-                  <a:srgbClr val="222222"/>
-                </a:solidFill>
-                <a:latin typeface="Calibri"/>
-              </a:rPr>
-              <a:t>Can be called from several places rather than copied.</a:t>
+              <a:rPr sz="2000" b="0">
+                <a:solidFill>
+                  <a:srgbClr val="222222"/>
+                </a:solidFill>
+                <a:latin typeface="Calibri"/>
+              </a:rPr>
+              <a:t>Each concern that can be described separately is a candidate component.</a:t>
             </a:r>
           </a:p>
           <a:p>
             <a:pPr/>
             <a:r>
-              <a:rPr sz="2200" b="0">
-                <a:solidFill>
-                  <a:srgbClr val="222222"/>
-                </a:solidFill>
-                <a:latin typeface="Calibri"/>
-              </a:rPr>
-              <a:t>Defined once, so a fix or change applies everywhere it is used.</a:t>
+              <a:rPr sz="2000" b="0">
+                <a:solidFill>
+                  <a:srgbClr val="222222"/>
+                </a:solidFill>
+                <a:latin typeface="Calibri"/>
+              </a:rPr>
+              <a:t>A school report system splits into collecting marks, calculating grades, formatting reports, distributing them.</a:t>
+            </a:r>
+          </a:p>
+          <a:p>
+            <a:pPr/>
+            <a:r>
+              <a:rPr sz="2000" b="0">
+                <a:solidFill>
+                  <a:srgbClr val="222222"/>
+                </a:solidFill>
+                <a:latin typeface="Calibri"/>
+              </a:rPr>
+              <a:t>Components should have minimal overlap: one job should live in exactly one component.</a:t>
             </a:r>
           </a:p>
         </p:txBody>
@@ -4856,7 +7496,7 @@
                 </a:solidFill>
                 <a:latin typeface="Calibri"/>
               </a:rPr>
-              <a:t>Ordering and dependencies</a:t>
+              <a:t>Decomposition</a:t>
             </a:r>
           </a:p>
         </p:txBody>
@@ -4885,37 +7525,61 @@
           <a:p>
             <a:pPr/>
             <a:r>
-              <a:rPr sz="2200" b="0">
-                <a:solidFill>
-                  <a:srgbClr val="222222"/>
-                </a:solidFill>
-                <a:latin typeface="Calibri"/>
-              </a:rPr>
-              <a:t>Some steps must run in a fixed order because one depends on another's output.</a:t>
+              <a:rPr sz="2000" b="0">
+                <a:solidFill>
+                  <a:srgbClr val="222222"/>
+                </a:solidFill>
+                <a:latin typeface="Calibri"/>
+              </a:rPr>
+              <a:t>Decomposition splits a large problem into smaller, more manageable sub-problems.</a:t>
             </a:r>
           </a:p>
           <a:p>
             <a:pPr/>
             <a:r>
-              <a:rPr sz="2200" b="0">
-                <a:solidFill>
-                  <a:srgbClr val="222222"/>
-                </a:solidFill>
-                <a:latin typeface="Calibri"/>
-              </a:rPr>
-              <a:t>Payroll: deduct tax must follow calculate gross pay, which it consumes.</a:t>
+              <a:rPr sz="2000" b="0">
+                <a:solidFill>
+                  <a:srgbClr val="222222"/>
+                </a:solidFill>
+                <a:latin typeface="Calibri"/>
+              </a:rPr>
+              <a:t>Each sub-problem is simpler to specify, solve and test than the whole.</a:t>
             </a:r>
           </a:p>
           <a:p>
             <a:pPr/>
             <a:r>
-              <a:rPr sz="2200" b="0">
-                <a:solidFill>
-                  <a:srgbClr val="222222"/>
-                </a:solidFill>
-                <a:latin typeface="Calibri"/>
-              </a:rPr>
-              <a:t>Independent steps can be reordered; dependent ones cannot.</a:t>
+              <a:rPr sz="2000" b="0">
+                <a:solidFill>
+                  <a:srgbClr val="222222"/>
+                </a:solidFill>
+                <a:latin typeface="Calibri"/>
+              </a:rPr>
+              <a:t>Decompose repeatedly until each sub-problem is small enough to solve directly.</a:t>
+            </a:r>
+          </a:p>
+          <a:p>
+            <a:pPr/>
+            <a:r>
+              <a:rPr sz="2000" b="0">
+                <a:solidFill>
+                  <a:srgbClr val="222222"/>
+                </a:solidFill>
+                <a:latin typeface="Calibri"/>
+              </a:rPr>
+              <a:t>The full solution is the sub-solutions combined in the right order.</a:t>
+            </a:r>
+          </a:p>
+          <a:p>
+            <a:pPr/>
+            <a:r>
+              <a:rPr sz="1800" b="1">
+                <a:solidFill>
+                  <a:srgbClr val="B76E00"/>
+                </a:solidFill>
+                <a:latin typeface="Calibri"/>
+              </a:rPr>
+              <a:t>Keep decomposition distinct from abstraction in written answers: split into parts, not remove detail.</a:t>
             </a:r>
           </a:p>
         </p:txBody>
@@ -4975,7 +7639,7 @@
                 </a:solidFill>
                 <a:latin typeface="Calibri"/>
               </a:rPr>
-              <a:t>Why it helps teams and maintenance</a:t>
+              <a:t>Identifying the components of a solution</a:t>
             </a:r>
           </a:p>
         </p:txBody>
@@ -5004,37 +7668,49 @@
           <a:p>
             <a:pPr/>
             <a:r>
-              <a:rPr sz="2200" b="0">
-                <a:solidFill>
-                  <a:srgbClr val="222222"/>
-                </a:solidFill>
-                <a:latin typeface="Calibri"/>
-              </a:rPr>
-              <a:t>Reuse: call the same routine in many places instead of duplicating code.</a:t>
+              <a:rPr sz="2000" b="0">
+                <a:solidFill>
+                  <a:srgbClr val="222222"/>
+                </a:solidFill>
+                <a:latin typeface="Calibri"/>
+              </a:rPr>
+              <a:t>Each sub-problem maps to a sub-procedure: a named block of code doing one clear job.</a:t>
             </a:r>
           </a:p>
           <a:p>
             <a:pPr/>
             <a:r>
-              <a:rPr sz="2200" b="0">
-                <a:solidFill>
-                  <a:srgbClr val="222222"/>
-                </a:solidFill>
-                <a:latin typeface="Calibri"/>
-              </a:rPr>
-              <a:t>Consistency: one definition avoids inconsistent copies.</a:t>
+              <a:rPr sz="2000" b="0">
+                <a:solidFill>
+                  <a:srgbClr val="222222"/>
+                </a:solidFill>
+                <a:latin typeface="Calibri"/>
+              </a:rPr>
+              <a:t>Good names describe the job, for example checkSeatAvailability or takePayment.</a:t>
             </a:r>
           </a:p>
           <a:p>
             <a:pPr/>
             <a:r>
-              <a:rPr sz="2200" b="0">
-                <a:solidFill>
-                  <a:srgbClr val="222222"/>
-                </a:solidFill>
-                <a:latin typeface="Calibri"/>
-              </a:rPr>
-              <a:t>Maintenance: fix once and all callers benefit.</a:t>
+              <a:rPr sz="2000" b="0">
+                <a:solidFill>
+                  <a:srgbClr val="222222"/>
+                </a:solidFill>
+                <a:latin typeface="Calibri"/>
+              </a:rPr>
+              <a:t>State what each sub-procedure takes in and gives out: its interface.</a:t>
+            </a:r>
+          </a:p>
+          <a:p>
+            <a:pPr/>
+            <a:r>
+              <a:rPr sz="2000" b="0">
+                <a:solidFill>
+                  <a:srgbClr val="222222"/>
+                </a:solidFill>
+                <a:latin typeface="Calibri"/>
+              </a:rPr>
+              <a:t>The main program then reads as a sequence of calls to these sub-procedures.</a:t>
             </a:r>
           </a:p>
         </p:txBody>
